--- a/docs/v12.3_簡報_口頭報告.pptx
+++ b/docs/v12.3_簡報_口頭報告.pptx
@@ -3138,7 +3138,7 @@
           <a:p>
             <a:r>
               <a:rPr lang="en-US" dirty="0"/>
-              <a:t>【約 45 秒】四條線各一句。部署那條是本週的結構性變化，特別點出來。</a:t>
+              <a:t>【約 45 秒】四條線用報告庫週報與 SUMMARY.md 的同一套定義，教授看過總覽再看投影片會對得上。每條只念加粗的結論；部署端是本週的結構性變化，特別點出來。</a:t>
             </a:r>
             <a:endParaRPr lang="en-US" dirty="0"/>
           </a:p>
@@ -3490,7 +3490,7 @@
           <a:p>
             <a:r>
               <a:rPr lang="en-US" dirty="0"/>
-              <a:t>【約 1 分 15 秒】指著圖：橘線（平板）一路往上爬、綠線（手機）第 3 段突然跳上去、灰線（662）一直平——但三條都在紅線上面。換成畫面感受：相機每秒 30 張，16 FPS 大約每兩張只辨識一張。「掉得越多」的原因（算力高 → 發熱大 → 先降頻）是推測，沒量功耗。</a:t>
+              <a:t>【約 1 分 15 秒】指著圖：橘線（平板）一路往上爬、綠線（手機）第 3 段突然跳上去、灰線（662）一直平——除了手機的前兩段，全都在紅線上面。換成畫面感受：相機每秒 30 張，16 FPS 大約每兩張只辨識一張。「掉得越多」的原因（算力高 → 發熱大 → 先降頻）是推測，沒量功耗。</a:t>
             </a:r>
             <a:endParaRPr lang="en-US" dirty="0"/>
           </a:p>
@@ -4927,12 +4927,12 @@
         </p:nvSpPr>
         <p:spPr>
           <a:xfrm>
-            <a:off x="640080" y="3703320"/>
-            <a:ext cx="10911535" cy="749808"/>
+            <a:off x="640080" y="3657600"/>
+            <a:ext cx="10911535" cy="914400"/>
           </a:xfrm>
           <a:prstGeom prst="roundRect">
             <a:avLst>
-              <a:gd name="adj" fmla="val 12195"/>
+              <a:gd name="adj" fmla="val 10000"/>
             </a:avLst>
           </a:prstGeom>
           <a:solidFill>
@@ -4954,8 +4954,8 @@
         </p:nvSpPr>
         <p:spPr>
           <a:xfrm>
-            <a:off x="960120" y="3840480"/>
-            <a:ext cx="10271455" cy="457200"/>
+            <a:off x="960120" y="3749040"/>
+            <a:ext cx="10271455" cy="731520"/>
           </a:xfrm>
           <a:prstGeom prst="rect">
             <a:avLst/>
@@ -4971,7 +4971,7 @@
               <a:buNone/>
             </a:pPr>
             <a:r>
-              <a:rPr lang="en-US" sz="1450" b="1" dirty="0">
+              <a:rPr lang="en-US" sz="1400" b="1" dirty="0">
                 <a:solidFill>
                   <a:srgbClr val="2C5F45"/>
                 </a:solidFill>
@@ -4985,7 +4985,7 @@
               <a:buNone/>
             </a:pPr>
             <a:r>
-              <a:rPr lang="en-US" sz="1450" dirty="0">
+              <a:rPr lang="en-US" sz="1400" dirty="0">
                 <a:solidFill>
                   <a:srgbClr val="1A2620"/>
                 </a:solidFill>
@@ -4993,9 +4993,9 @@
                 <a:ea typeface="Microsoft JhengHei" pitchFamily="34" charset="-122"/>
                 <a:cs typeface="Microsoft JhengHei" pitchFamily="34" charset="-120"/>
               </a:rPr>
-              <a:t>天璣 8300、Snapdragon 8 Gen 2、三台整合三篇實機測試報告已推上報告庫。</a:t>
-            </a:r>
-            <a:endParaRPr lang="en-US" sz="1450" dirty="0"/>
+              <a:t>天璣 8300、Snapdragon 8 Gen 2、三台整合三篇實機測試報告已推上報告庫；報告庫的 09-13 週報已補入高階裝置，並新增給教授與評審看的成果總覽 SUMMARY.md。</a:t>
+            </a:r>
+            <a:endParaRPr lang="en-US" sz="1400" dirty="0"/>
           </a:p>
         </p:txBody>
       </p:sp>
@@ -5007,12 +5007,12 @@
         </p:nvSpPr>
         <p:spPr>
           <a:xfrm>
-            <a:off x="640080" y="4663440"/>
-            <a:ext cx="10911535" cy="1463040"/>
+            <a:off x="640080" y="4709160"/>
+            <a:ext cx="10911535" cy="1600200"/>
           </a:xfrm>
           <a:prstGeom prst="roundRect">
             <a:avLst>
-              <a:gd name="adj" fmla="val 6250"/>
+              <a:gd name="adj" fmla="val 5714"/>
             </a:avLst>
           </a:prstGeom>
           <a:solidFill>
@@ -5034,7 +5034,7 @@
         </p:nvSpPr>
         <p:spPr>
           <a:xfrm>
-            <a:off x="960120" y="4800600"/>
+            <a:off x="960120" y="4828032"/>
             <a:ext cx="10271455" cy="365760"/>
           </a:xfrm>
           <a:prstGeom prst="rect">
@@ -5073,8 +5073,8 @@
         </p:nvSpPr>
         <p:spPr>
           <a:xfrm>
-            <a:off x="960120" y="5212080"/>
-            <a:ext cx="10271455" cy="777240"/>
+            <a:off x="960120" y="5230368"/>
+            <a:ext cx="10271455" cy="960120"/>
           </a:xfrm>
           <a:prstGeom prst="rect">
             <a:avLst/>
@@ -5090,7 +5090,7 @@
               <a:buNone/>
             </a:pPr>
             <a:r>
-              <a:rPr lang="en-US" sz="1350" dirty="0">
+              <a:rPr lang="en-US" sz="1300" dirty="0">
                 <a:solidFill>
                   <a:srgbClr val="1A2620"/>
                 </a:solidFill>
@@ -5100,14 +5100,14 @@
               </a:rPr>
               <a:t>模型架構與損失改動　·　放大模型　·　官方匯出參數　·　662 上的即時辨識　·　NNAPI</a:t>
             </a:r>
-            <a:endParaRPr lang="en-US" sz="1350" dirty="0"/>
+            <a:endParaRPr lang="en-US" sz="1300" dirty="0"/>
           </a:p>
           <a:p>
             <a:pPr indent="0" marL="0">
               <a:buNone/>
             </a:pPr>
             <a:r>
-              <a:rPr lang="en-US" sz="1350" dirty="0">
+              <a:rPr lang="en-US" sz="1300" dirty="0">
                 <a:solidFill>
                   <a:srgbClr val="1A2620"/>
                 </a:solidFill>
@@ -5115,9 +5115,26 @@
                 <a:ea typeface="Microsoft JhengHei" pitchFamily="34" charset="-122"/>
                 <a:cs typeface="Microsoft JhengHei" pitchFamily="34" charset="-120"/>
               </a:rPr>
-              <a:t>外部影像（除非拿得到同域照片）　·　刪除薊馬葉害　·　只憑短時間量測下即時辨識的結論</a:t>
-            </a:r>
-            <a:endParaRPr lang="en-US" sz="1350" dirty="0"/>
+              <a:t>影像合成與生成　·　自動標註（色彩門檻找框、以現有模型預標）　·　外部影像（除非拿得到同域照片）</a:t>
+            </a:r>
+            <a:endParaRPr lang="en-US" sz="1300" dirty="0"/>
+          </a:p>
+          <a:p>
+            <a:pPr indent="0" marL="0">
+              <a:buNone/>
+            </a:pPr>
+            <a:r>
+              <a:rPr lang="en-US" sz="1300" dirty="0">
+                <a:solidFill>
+                  <a:srgbClr val="1A2620"/>
+                </a:solidFill>
+                <a:latin typeface="Microsoft JhengHei" pitchFamily="34" charset="0"/>
+                <a:ea typeface="Microsoft JhengHei" pitchFamily="34" charset="-122"/>
+                <a:cs typeface="Microsoft JhengHei" pitchFamily="34" charset="-120"/>
+              </a:rPr>
+              <a:t>刪除薊馬葉害　·　只憑短時間量測下即時辨識的結論</a:t>
+            </a:r>
+            <a:endParaRPr lang="en-US" sz="1300" dirty="0"/>
           </a:p>
         </p:txBody>
       </p:sp>
@@ -5335,7 +5352,7 @@
                 <a:ea typeface="Microsoft JhengHei" pitchFamily="34" charset="-122"/>
                 <a:cs typeface="Microsoft JhengHei" pitchFamily="34" charset="-120"/>
               </a:rPr>
-              <a:t>同 8 個 fp32 檔案、同一套量測方法；662 於 09-14 補量，與舊數字差距 ±3.1% 內</a:t>
+              <a:t>同 8 個 fp32 檔案、同一套量測方法　·　延遲與 mAP50 都來自 v11.5 權重的匯出檔，交付的 v5.7 尚未重新匯出</a:t>
             </a:r>
             <a:endParaRPr lang="en-US" sz="1500" dirty="0"/>
           </a:p>
@@ -9707,7 +9724,7 @@
                 <a:ea typeface="Microsoft JhengHei" pitchFamily="34" charset="-122"/>
                 <a:cs typeface="Microsoft JhengHei" pitchFamily="34" charset="-120"/>
               </a:rPr>
-              <a:t>每一條都可以從 git 紀錄查到 commit 時間</a:t>
+              <a:t>每一條都可以從 git 紀錄或登記文件查到時間（與報告庫週報表 2-1 一致）</a:t>
             </a:r>
             <a:endParaRPr lang="en-US" sz="1500" dirty="0"/>
           </a:p>
@@ -9721,12 +9738,12 @@
         </p:nvSpPr>
         <p:spPr>
           <a:xfrm>
-            <a:off x="640080" y="1645920"/>
-            <a:ext cx="10911535" cy="621792"/>
+            <a:off x="640080" y="1572768"/>
+            <a:ext cx="10911535" cy="475488"/>
           </a:xfrm>
           <a:prstGeom prst="roundRect">
             <a:avLst>
-              <a:gd name="adj" fmla="val 14706"/>
+              <a:gd name="adj" fmla="val 19231"/>
             </a:avLst>
           </a:prstGeom>
           <a:solidFill>
@@ -9748,8 +9765,8 @@
         </p:nvSpPr>
         <p:spPr>
           <a:xfrm>
-            <a:off x="822960" y="1755648"/>
-            <a:ext cx="402336" cy="402336"/>
+            <a:off x="822960" y="1636776"/>
+            <a:ext cx="347472" cy="347472"/>
           </a:xfrm>
           <a:prstGeom prst="ellipse">
             <a:avLst/>
@@ -9768,8 +9785,8 @@
         </p:nvSpPr>
         <p:spPr>
           <a:xfrm>
-            <a:off x="822960" y="1755648"/>
-            <a:ext cx="402336" cy="402336"/>
+            <a:off x="822960" y="1636776"/>
+            <a:ext cx="347472" cy="347472"/>
           </a:xfrm>
           <a:prstGeom prst="rect">
             <a:avLst/>
@@ -9785,7 +9802,7 @@
               <a:buNone/>
             </a:pPr>
             <a:r>
-              <a:rPr lang="en-US" sz="1100" b="1" dirty="0">
+              <a:rPr lang="en-US" sz="1000" b="1" dirty="0">
                 <a:solidFill>
                   <a:srgbClr val="FFFFFF"/>
                 </a:solidFill>
@@ -9795,7 +9812,7 @@
               </a:rPr>
               <a:t>1</a:t>
             </a:r>
-            <a:endParaRPr lang="en-US" sz="1100" dirty="0"/>
+            <a:endParaRPr lang="en-US" sz="1000" dirty="0"/>
           </a:p>
         </p:txBody>
       </p:sp>
@@ -9807,8 +9824,250 @@
         </p:nvSpPr>
         <p:spPr>
           <a:xfrm>
-            <a:off x="1417320" y="1645920"/>
-            <a:ext cx="1645920" cy="621792"/>
+            <a:off x="1417320" y="1572768"/>
+            <a:ext cx="1645920" cy="475488"/>
+          </a:xfrm>
+          <a:prstGeom prst="rect">
+            <a:avLst/>
+          </a:prstGeom>
+          <a:noFill/>
+          <a:ln/>
+        </p:spPr>
+        <p:txBody>
+          <a:bodyPr wrap="square" lIns="0" tIns="0" rIns="0" bIns="0" rtlCol="0" anchor="ctr"/>
+          <a:lstStyle/>
+          <a:p>
+            <a:pPr indent="0" marL="0">
+              <a:buNone/>
+            </a:pPr>
+            <a:r>
+              <a:rPr lang="en-US" sz="1300" b="1" dirty="0">
+                <a:solidFill>
+                  <a:srgbClr val="0F2E22"/>
+                </a:solidFill>
+                <a:latin typeface="Microsoft JhengHei" pitchFamily="34" charset="0"/>
+                <a:ea typeface="Microsoft JhengHei" pitchFamily="34" charset="-122"/>
+                <a:cs typeface="Microsoft JhengHei" pitchFamily="34" charset="-120"/>
+              </a:rPr>
+              <a:t>2026-08</a:t>
+            </a:r>
+            <a:endParaRPr lang="en-US" sz="1300" dirty="0"/>
+          </a:p>
+        </p:txBody>
+      </p:sp>
+      <p:sp>
+        <p:nvSpPr>
+          <p:cNvPr id="8" name="Text 6"/>
+          <p:cNvSpPr txBox="1"/>
+          <p:nvPr/>
+        </p:nvSpPr>
+        <p:spPr>
+          <a:xfrm>
+            <a:off x="3108960" y="1572768"/>
+            <a:ext cx="4480560" cy="475488"/>
+          </a:xfrm>
+          <a:prstGeom prst="rect">
+            <a:avLst/>
+          </a:prstGeom>
+          <a:noFill/>
+          <a:ln/>
+        </p:spPr>
+        <p:txBody>
+          <a:bodyPr wrap="square" lIns="0" tIns="0" rIns="0" bIns="0" rtlCol="0" anchor="ctr"/>
+          <a:lstStyle/>
+          <a:p>
+            <a:pPr indent="0" marL="0">
+              <a:buNone/>
+            </a:pPr>
+            <a:r>
+              <a:rPr lang="en-US" sz="1350" dirty="0">
+                <a:solidFill>
+                  <a:srgbClr val="1A2620"/>
+                </a:solidFill>
+                <a:latin typeface="Microsoft JhengHei" pitchFamily="34" charset="0"/>
+                <a:ea typeface="Microsoft JhengHei" pitchFamily="34" charset="-122"/>
+                <a:cs typeface="Microsoft JhengHei" pitchFamily="34" charset="-120"/>
+              </a:rPr>
+              <a:t>標註一致性門檻：兩人中位 IoU ≥ 0.85</a:t>
+            </a:r>
+            <a:endParaRPr lang="en-US" sz="1350" dirty="0"/>
+          </a:p>
+        </p:txBody>
+      </p:sp>
+      <p:sp>
+        <p:nvSpPr>
+          <p:cNvPr id="9" name="Text 7"/>
+          <p:cNvSpPr txBox="1"/>
+          <p:nvPr/>
+        </p:nvSpPr>
+        <p:spPr>
+          <a:xfrm>
+            <a:off x="7635240" y="1572768"/>
+            <a:ext cx="1645920" cy="475488"/>
+          </a:xfrm>
+          <a:prstGeom prst="rect">
+            <a:avLst/>
+          </a:prstGeom>
+          <a:noFill/>
+          <a:ln/>
+        </p:spPr>
+        <p:txBody>
+          <a:bodyPr wrap="square" lIns="0" tIns="0" rIns="0" bIns="0" rtlCol="0" anchor="ctr"/>
+          <a:lstStyle/>
+          <a:p>
+            <a:pPr indent="0" marL="0">
+              <a:buNone/>
+            </a:pPr>
+            <a:r>
+              <a:rPr lang="en-US" sz="1200" dirty="0">
+                <a:solidFill>
+                  <a:srgbClr val="5E6F66"/>
+                </a:solidFill>
+                <a:latin typeface="Microsoft JhengHei" pitchFamily="34" charset="0"/>
+                <a:ea typeface="Microsoft JhengHei" pitchFamily="34" charset="-122"/>
+                <a:cs typeface="Microsoft JhengHei" pitchFamily="34" charset="-120"/>
+              </a:rPr>
+              <a:t>v11 計畫書</a:t>
+            </a:r>
+            <a:endParaRPr lang="en-US" sz="1200" dirty="0"/>
+          </a:p>
+        </p:txBody>
+      </p:sp>
+      <p:sp>
+        <p:nvSpPr>
+          <p:cNvPr id="10" name="Text 8"/>
+          <p:cNvSpPr txBox="1"/>
+          <p:nvPr/>
+        </p:nvSpPr>
+        <p:spPr>
+          <a:xfrm>
+            <a:off x="9326880" y="1572768"/>
+            <a:ext cx="2041855" cy="475488"/>
+          </a:xfrm>
+          <a:prstGeom prst="rect">
+            <a:avLst/>
+          </a:prstGeom>
+          <a:noFill/>
+          <a:ln/>
+        </p:spPr>
+        <p:txBody>
+          <a:bodyPr wrap="square" lIns="0" tIns="0" rIns="0" bIns="0" rtlCol="0" anchor="ctr"/>
+          <a:lstStyle/>
+          <a:p>
+            <a:pPr indent="0" marL="0">
+              <a:buNone/>
+            </a:pPr>
+            <a:r>
+              <a:rPr lang="en-US" sz="1250" b="1" dirty="0">
+                <a:solidFill>
+                  <a:srgbClr val="2C5F45"/>
+                </a:solidFill>
+                <a:latin typeface="Microsoft JhengHei" pitchFamily="34" charset="0"/>
+                <a:ea typeface="Microsoft JhengHei" pitchFamily="34" charset="-122"/>
+                <a:cs typeface="Microsoft JhengHei" pitchFamily="34" charset="-120"/>
+              </a:rPr>
+              <a:t>09-12 才量工作包 A</a:t>
+            </a:r>
+            <a:endParaRPr lang="en-US" sz="1250" dirty="0"/>
+          </a:p>
+        </p:txBody>
+      </p:sp>
+      <p:sp>
+        <p:nvSpPr>
+          <p:cNvPr id="11" name="Shape 9"/>
+          <p:cNvSpPr/>
+          <p:nvPr/>
+        </p:nvSpPr>
+        <p:spPr>
+          <a:xfrm>
+            <a:off x="640080" y="2121408"/>
+            <a:ext cx="10911535" cy="475488"/>
+          </a:xfrm>
+          <a:prstGeom prst="roundRect">
+            <a:avLst>
+              <a:gd name="adj" fmla="val 19231"/>
+            </a:avLst>
+          </a:prstGeom>
+          <a:solidFill>
+            <a:srgbClr val="EAF2EC"/>
+          </a:solidFill>
+          <a:ln w="12700">
+            <a:solidFill>
+              <a:srgbClr val="EAF2EC"/>
+            </a:solidFill>
+            <a:prstDash val="solid"/>
+          </a:ln>
+        </p:spPr>
+      </p:sp>
+      <p:sp>
+        <p:nvSpPr>
+          <p:cNvPr id="12" name="Shape 10"/>
+          <p:cNvSpPr/>
+          <p:nvPr/>
+        </p:nvSpPr>
+        <p:spPr>
+          <a:xfrm>
+            <a:off x="822960" y="2185416"/>
+            <a:ext cx="347472" cy="347472"/>
+          </a:xfrm>
+          <a:prstGeom prst="ellipse">
+            <a:avLst/>
+          </a:prstGeom>
+          <a:solidFill>
+            <a:srgbClr val="2C5F45"/>
+          </a:solidFill>
+          <a:ln/>
+        </p:spPr>
+      </p:sp>
+      <p:sp>
+        <p:nvSpPr>
+          <p:cNvPr id="13" name="Text 11"/>
+          <p:cNvSpPr txBox="1"/>
+          <p:nvPr/>
+        </p:nvSpPr>
+        <p:spPr>
+          <a:xfrm>
+            <a:off x="822960" y="2185416"/>
+            <a:ext cx="347472" cy="347472"/>
+          </a:xfrm>
+          <a:prstGeom prst="rect">
+            <a:avLst/>
+          </a:prstGeom>
+          <a:noFill/>
+          <a:ln/>
+        </p:spPr>
+        <p:txBody>
+          <a:bodyPr wrap="square" lIns="0" tIns="0" rIns="0" bIns="0" rtlCol="0" anchor="ctr"/>
+          <a:lstStyle/>
+          <a:p>
+            <a:pPr algn="ctr" indent="0" marL="0">
+              <a:buNone/>
+            </a:pPr>
+            <a:r>
+              <a:rPr lang="en-US" sz="1000" b="1" dirty="0">
+                <a:solidFill>
+                  <a:srgbClr val="FFFFFF"/>
+                </a:solidFill>
+                <a:latin typeface="Microsoft JhengHei" pitchFamily="34" charset="0"/>
+                <a:ea typeface="Microsoft JhengHei" pitchFamily="34" charset="-122"/>
+                <a:cs typeface="Microsoft JhengHei" pitchFamily="34" charset="-120"/>
+              </a:rPr>
+              <a:t>2</a:t>
+            </a:r>
+            <a:endParaRPr lang="en-US" sz="1000" dirty="0"/>
+          </a:p>
+        </p:txBody>
+      </p:sp>
+      <p:sp>
+        <p:nvSpPr>
+          <p:cNvPr id="14" name="Text 12"/>
+          <p:cNvSpPr txBox="1"/>
+          <p:nvPr/>
+        </p:nvSpPr>
+        <p:spPr>
+          <a:xfrm>
+            <a:off x="1417320" y="2121408"/>
+            <a:ext cx="1645920" cy="475488"/>
           </a:xfrm>
           <a:prstGeom prst="rect">
             <a:avLst/>
@@ -9840,14 +10099,14 @@
       </p:sp>
       <p:sp>
         <p:nvSpPr>
-          <p:cNvPr id="8" name="Text 6"/>
+          <p:cNvPr id="15" name="Text 13"/>
           <p:cNvSpPr txBox="1"/>
           <p:nvPr/>
         </p:nvSpPr>
         <p:spPr>
           <a:xfrm>
-            <a:off x="3108960" y="1645920"/>
-            <a:ext cx="4480560" cy="621792"/>
+            <a:off x="3108960" y="2121408"/>
+            <a:ext cx="4480560" cy="475488"/>
           </a:xfrm>
           <a:prstGeom prst="rect">
             <a:avLst/>
@@ -9879,14 +10138,14 @@
       </p:sp>
       <p:sp>
         <p:nvSpPr>
-          <p:cNvPr id="9" name="Text 7"/>
+          <p:cNvPr id="16" name="Text 14"/>
           <p:cNvSpPr txBox="1"/>
           <p:nvPr/>
         </p:nvSpPr>
         <p:spPr>
           <a:xfrm>
-            <a:off x="7635240" y="1645920"/>
-            <a:ext cx="1645920" cy="621792"/>
+            <a:off x="7635240" y="2121408"/>
+            <a:ext cx="1645920" cy="475488"/>
           </a:xfrm>
           <a:prstGeom prst="rect">
             <a:avLst/>
@@ -9918,14 +10177,14 @@
       </p:sp>
       <p:sp>
         <p:nvSpPr>
-          <p:cNvPr id="10" name="Text 8"/>
+          <p:cNvPr id="17" name="Text 15"/>
           <p:cNvSpPr txBox="1"/>
           <p:nvPr/>
         </p:nvSpPr>
         <p:spPr>
           <a:xfrm>
-            <a:off x="9326880" y="1645920"/>
-            <a:ext cx="2041855" cy="621792"/>
+            <a:off x="9326880" y="2121408"/>
+            <a:ext cx="2041855" cy="475488"/>
           </a:xfrm>
           <a:prstGeom prst="rect">
             <a:avLst/>
@@ -9957,18 +10216,260 @@
       </p:sp>
       <p:sp>
         <p:nvSpPr>
-          <p:cNvPr id="11" name="Shape 9"/>
+          <p:cNvPr id="18" name="Shape 16"/>
           <p:cNvSpPr/>
           <p:nvPr/>
         </p:nvSpPr>
         <p:spPr>
           <a:xfrm>
-            <a:off x="640080" y="2377440"/>
-            <a:ext cx="10911535" cy="621792"/>
+            <a:off x="640080" y="2670048"/>
+            <a:ext cx="10911535" cy="475488"/>
           </a:xfrm>
           <a:prstGeom prst="roundRect">
             <a:avLst>
-              <a:gd name="adj" fmla="val 14706"/>
+              <a:gd name="adj" fmla="val 19231"/>
+            </a:avLst>
+          </a:prstGeom>
+          <a:solidFill>
+            <a:srgbClr val="F6F9F7"/>
+          </a:solidFill>
+          <a:ln w="12700">
+            <a:solidFill>
+              <a:srgbClr val="F6F9F7"/>
+            </a:solidFill>
+            <a:prstDash val="solid"/>
+          </a:ln>
+        </p:spPr>
+      </p:sp>
+      <p:sp>
+        <p:nvSpPr>
+          <p:cNvPr id="19" name="Shape 17"/>
+          <p:cNvSpPr/>
+          <p:nvPr/>
+        </p:nvSpPr>
+        <p:spPr>
+          <a:xfrm>
+            <a:off x="822960" y="2734056"/>
+            <a:ext cx="347472" cy="347472"/>
+          </a:xfrm>
+          <a:prstGeom prst="ellipse">
+            <a:avLst/>
+          </a:prstGeom>
+          <a:solidFill>
+            <a:srgbClr val="2C5F45"/>
+          </a:solidFill>
+          <a:ln/>
+        </p:spPr>
+      </p:sp>
+      <p:sp>
+        <p:nvSpPr>
+          <p:cNvPr id="20" name="Text 18"/>
+          <p:cNvSpPr txBox="1"/>
+          <p:nvPr/>
+        </p:nvSpPr>
+        <p:spPr>
+          <a:xfrm>
+            <a:off x="822960" y="2734056"/>
+            <a:ext cx="347472" cy="347472"/>
+          </a:xfrm>
+          <a:prstGeom prst="rect">
+            <a:avLst/>
+          </a:prstGeom>
+          <a:noFill/>
+          <a:ln/>
+        </p:spPr>
+        <p:txBody>
+          <a:bodyPr wrap="square" lIns="0" tIns="0" rIns="0" bIns="0" rtlCol="0" anchor="ctr"/>
+          <a:lstStyle/>
+          <a:p>
+            <a:pPr algn="ctr" indent="0" marL="0">
+              <a:buNone/>
+            </a:pPr>
+            <a:r>
+              <a:rPr lang="en-US" sz="1000" b="1" dirty="0">
+                <a:solidFill>
+                  <a:srgbClr val="FFFFFF"/>
+                </a:solidFill>
+                <a:latin typeface="Microsoft JhengHei" pitchFamily="34" charset="0"/>
+                <a:ea typeface="Microsoft JhengHei" pitchFamily="34" charset="-122"/>
+                <a:cs typeface="Microsoft JhengHei" pitchFamily="34" charset="-120"/>
+              </a:rPr>
+              <a:t>3</a:t>
+            </a:r>
+            <a:endParaRPr lang="en-US" sz="1000" dirty="0"/>
+          </a:p>
+        </p:txBody>
+      </p:sp>
+      <p:sp>
+        <p:nvSpPr>
+          <p:cNvPr id="21" name="Text 19"/>
+          <p:cNvSpPr txBox="1"/>
+          <p:nvPr/>
+        </p:nvSpPr>
+        <p:spPr>
+          <a:xfrm>
+            <a:off x="1417320" y="2670048"/>
+            <a:ext cx="1645920" cy="475488"/>
+          </a:xfrm>
+          <a:prstGeom prst="rect">
+            <a:avLst/>
+          </a:prstGeom>
+          <a:noFill/>
+          <a:ln/>
+        </p:spPr>
+        <p:txBody>
+          <a:bodyPr wrap="square" lIns="0" tIns="0" rIns="0" bIns="0" rtlCol="0" anchor="ctr"/>
+          <a:lstStyle/>
+          <a:p>
+            <a:pPr indent="0" marL="0">
+              <a:buNone/>
+            </a:pPr>
+            <a:r>
+              <a:rPr lang="en-US" sz="1300" b="1" dirty="0">
+                <a:solidFill>
+                  <a:srgbClr val="0F2E22"/>
+                </a:solidFill>
+                <a:latin typeface="Microsoft JhengHei" pitchFamily="34" charset="0"/>
+                <a:ea typeface="Microsoft JhengHei" pitchFamily="34" charset="-122"/>
+                <a:cs typeface="Microsoft JhengHei" pitchFamily="34" charset="-120"/>
+              </a:rPr>
+              <a:t>09-12 23:44</a:t>
+            </a:r>
+            <a:endParaRPr lang="en-US" sz="1300" dirty="0"/>
+          </a:p>
+        </p:txBody>
+      </p:sp>
+      <p:sp>
+        <p:nvSpPr>
+          <p:cNvPr id="22" name="Text 20"/>
+          <p:cNvSpPr txBox="1"/>
+          <p:nvPr/>
+        </p:nvSpPr>
+        <p:spPr>
+          <a:xfrm>
+            <a:off x="3108960" y="2670048"/>
+            <a:ext cx="4480560" cy="475488"/>
+          </a:xfrm>
+          <a:prstGeom prst="rect">
+            <a:avLst/>
+          </a:prstGeom>
+          <a:noFill/>
+          <a:ln/>
+        </p:spPr>
+        <p:txBody>
+          <a:bodyPr wrap="square" lIns="0" tIns="0" rIns="0" bIns="0" rtlCol="0" anchor="ctr"/>
+          <a:lstStyle/>
+          <a:p>
+            <a:pPr indent="0" marL="0">
+              <a:buNone/>
+            </a:pPr>
+            <a:r>
+              <a:rPr lang="en-US" sz="1350" dirty="0">
+                <a:solidFill>
+                  <a:srgbClr val="1A2620"/>
+                </a:solidFill>
+                <a:latin typeface="Microsoft JhengHei" pitchFamily="34" charset="0"/>
+                <a:ea typeface="Microsoft JhengHei" pitchFamily="34" charset="-122"/>
+                <a:cs typeface="Microsoft JhengHei" pitchFamily="34" charset="-120"/>
+              </a:rPr>
+              <a:t>薊馬葉害「一張葉子一個框」重測規則</a:t>
+            </a:r>
+            <a:endParaRPr lang="en-US" sz="1350" dirty="0"/>
+          </a:p>
+        </p:txBody>
+      </p:sp>
+      <p:sp>
+        <p:nvSpPr>
+          <p:cNvPr id="23" name="Text 21"/>
+          <p:cNvSpPr txBox="1"/>
+          <p:nvPr/>
+        </p:nvSpPr>
+        <p:spPr>
+          <a:xfrm>
+            <a:off x="7635240" y="2670048"/>
+            <a:ext cx="1645920" cy="475488"/>
+          </a:xfrm>
+          <a:prstGeom prst="rect">
+            <a:avLst/>
+          </a:prstGeom>
+          <a:noFill/>
+          <a:ln/>
+        </p:spPr>
+        <p:txBody>
+          <a:bodyPr wrap="square" lIns="0" tIns="0" rIns="0" bIns="0" rtlCol="0" anchor="ctr"/>
+          <a:lstStyle/>
+          <a:p>
+            <a:pPr indent="0" marL="0">
+              <a:buNone/>
+            </a:pPr>
+            <a:r>
+              <a:rPr lang="en-US" sz="1200" dirty="0">
+                <a:solidFill>
+                  <a:srgbClr val="5E6F66"/>
+                </a:solidFill>
+                <a:latin typeface="Consolas" pitchFamily="34" charset="0"/>
+                <a:ea typeface="Consolas" pitchFamily="34" charset="-122"/>
+                <a:cs typeface="Consolas" pitchFamily="34" charset="-120"/>
+              </a:rPr>
+              <a:t>2914698</a:t>
+            </a:r>
+            <a:endParaRPr lang="en-US" sz="1200" dirty="0"/>
+          </a:p>
+        </p:txBody>
+      </p:sp>
+      <p:sp>
+        <p:nvSpPr>
+          <p:cNvPr id="24" name="Text 22"/>
+          <p:cNvSpPr txBox="1"/>
+          <p:nvPr/>
+        </p:nvSpPr>
+        <p:spPr>
+          <a:xfrm>
+            <a:off x="9326880" y="2670048"/>
+            <a:ext cx="2041855" cy="475488"/>
+          </a:xfrm>
+          <a:prstGeom prst="rect">
+            <a:avLst/>
+          </a:prstGeom>
+          <a:noFill/>
+          <a:ln/>
+        </p:spPr>
+        <p:txBody>
+          <a:bodyPr wrap="square" lIns="0" tIns="0" rIns="0" bIns="0" rtlCol="0" anchor="ctr"/>
+          <a:lstStyle/>
+          <a:p>
+            <a:pPr indent="0" marL="0">
+              <a:buNone/>
+            </a:pPr>
+            <a:r>
+              <a:rPr lang="en-US" sz="1250" b="1" dirty="0">
+                <a:solidFill>
+                  <a:srgbClr val="2C5F45"/>
+                </a:solidFill>
+                <a:latin typeface="Microsoft JhengHei" pitchFamily="34" charset="0"/>
+                <a:ea typeface="Microsoft JhengHei" pitchFamily="34" charset="-122"/>
+                <a:cs typeface="Microsoft JhengHei" pitchFamily="34" charset="-120"/>
+              </a:rPr>
+              <a:t>23:51、23:53 才有重測結果</a:t>
+            </a:r>
+            <a:endParaRPr lang="en-US" sz="1250" dirty="0"/>
+          </a:p>
+        </p:txBody>
+      </p:sp>
+      <p:sp>
+        <p:nvSpPr>
+          <p:cNvPr id="25" name="Shape 23"/>
+          <p:cNvSpPr/>
+          <p:nvPr/>
+        </p:nvSpPr>
+        <p:spPr>
+          <a:xfrm>
+            <a:off x="640080" y="3218688"/>
+            <a:ext cx="10911535" cy="475488"/>
+          </a:xfrm>
+          <a:prstGeom prst="roundRect">
+            <a:avLst>
+              <a:gd name="adj" fmla="val 19231"/>
             </a:avLst>
           </a:prstGeom>
           <a:solidFill>
@@ -9984,14 +10485,14 @@
       </p:sp>
       <p:sp>
         <p:nvSpPr>
-          <p:cNvPr id="12" name="Shape 10"/>
+          <p:cNvPr id="26" name="Shape 24"/>
           <p:cNvSpPr/>
           <p:nvPr/>
         </p:nvSpPr>
         <p:spPr>
           <a:xfrm>
-            <a:off x="822960" y="2487168"/>
-            <a:ext cx="402336" cy="402336"/>
+            <a:off x="822960" y="3282696"/>
+            <a:ext cx="347472" cy="347472"/>
           </a:xfrm>
           <a:prstGeom prst="ellipse">
             <a:avLst/>
@@ -10004,14 +10505,14 @@
       </p:sp>
       <p:sp>
         <p:nvSpPr>
-          <p:cNvPr id="13" name="Text 11"/>
+          <p:cNvPr id="27" name="Text 25"/>
           <p:cNvSpPr txBox="1"/>
           <p:nvPr/>
         </p:nvSpPr>
         <p:spPr>
           <a:xfrm>
-            <a:off x="822960" y="2487168"/>
-            <a:ext cx="402336" cy="402336"/>
+            <a:off x="822960" y="3282696"/>
+            <a:ext cx="347472" cy="347472"/>
           </a:xfrm>
           <a:prstGeom prst="rect">
             <a:avLst/>
@@ -10027,7 +10528,7 @@
               <a:buNone/>
             </a:pPr>
             <a:r>
-              <a:rPr lang="en-US" sz="1100" b="1" dirty="0">
+              <a:rPr lang="en-US" sz="1000" b="1" dirty="0">
                 <a:solidFill>
                   <a:srgbClr val="FFFFFF"/>
                 </a:solidFill>
@@ -10035,22 +10536,22 @@
                 <a:ea typeface="Microsoft JhengHei" pitchFamily="34" charset="-122"/>
                 <a:cs typeface="Microsoft JhengHei" pitchFamily="34" charset="-120"/>
               </a:rPr>
-              <a:t>2</a:t>
-            </a:r>
-            <a:endParaRPr lang="en-US" sz="1100" dirty="0"/>
-          </a:p>
-        </p:txBody>
-      </p:sp>
-      <p:sp>
-        <p:nvSpPr>
-          <p:cNvPr id="14" name="Text 12"/>
+              <a:t>4</a:t>
+            </a:r>
+            <a:endParaRPr lang="en-US" sz="1000" dirty="0"/>
+          </a:p>
+        </p:txBody>
+      </p:sp>
+      <p:sp>
+        <p:nvSpPr>
+          <p:cNvPr id="28" name="Text 26"/>
           <p:cNvSpPr txBox="1"/>
           <p:nvPr/>
         </p:nvSpPr>
         <p:spPr>
           <a:xfrm>
-            <a:off x="1417320" y="2377440"/>
-            <a:ext cx="1645920" cy="621792"/>
+            <a:off x="1417320" y="3218688"/>
+            <a:ext cx="1645920" cy="475488"/>
           </a:xfrm>
           <a:prstGeom prst="rect">
             <a:avLst/>
@@ -10074,7 +10575,7 @@
                 <a:ea typeface="Microsoft JhengHei" pitchFamily="34" charset="-122"/>
                 <a:cs typeface="Microsoft JhengHei" pitchFamily="34" charset="-120"/>
               </a:rPr>
-              <a:t>09-12 23:44</a:t>
+              <a:t>09-13 凌晨</a:t>
             </a:r>
             <a:endParaRPr lang="en-US" sz="1300" dirty="0"/>
           </a:p>
@@ -10082,14 +10583,14 @@
       </p:sp>
       <p:sp>
         <p:nvSpPr>
-          <p:cNvPr id="15" name="Text 13"/>
+          <p:cNvPr id="29" name="Text 27"/>
           <p:cNvSpPr txBox="1"/>
           <p:nvPr/>
         </p:nvSpPr>
         <p:spPr>
           <a:xfrm>
-            <a:off x="3108960" y="2377440"/>
-            <a:ext cx="4480560" cy="621792"/>
+            <a:off x="3108960" y="3218688"/>
+            <a:ext cx="4480560" cy="475488"/>
           </a:xfrm>
           <a:prstGeom prst="rect">
             <a:avLst/>
@@ -10113,7 +10614,7 @@
                 <a:ea typeface="Microsoft JhengHei" pitchFamily="34" charset="-122"/>
                 <a:cs typeface="Microsoft JhengHei" pitchFamily="34" charset="-120"/>
               </a:rPr>
-              <a:t>薊馬葉害「一張葉子一個框」重測規則</a:t>
+              <a:t>外部影像增益 0.04、矛盾門檻 0.165（驗收文件）</a:t>
             </a:r>
             <a:endParaRPr lang="en-US" sz="1350" dirty="0"/>
           </a:p>
@@ -10121,14 +10622,14 @@
       </p:sp>
       <p:sp>
         <p:nvSpPr>
-          <p:cNvPr id="16" name="Text 14"/>
+          <p:cNvPr id="30" name="Text 28"/>
           <p:cNvSpPr txBox="1"/>
           <p:nvPr/>
         </p:nvSpPr>
         <p:spPr>
           <a:xfrm>
-            <a:off x="7635240" y="2377440"/>
-            <a:ext cx="1645920" cy="621792"/>
+            <a:off x="7635240" y="3218688"/>
+            <a:ext cx="1645920" cy="475488"/>
           </a:xfrm>
           <a:prstGeom prst="rect">
             <a:avLst/>
@@ -10152,7 +10653,7 @@
                 <a:ea typeface="Consolas" pitchFamily="34" charset="-122"/>
                 <a:cs typeface="Consolas" pitchFamily="34" charset="-120"/>
               </a:rPr>
-              <a:t>2914698</a:t>
+              <a:t>fc729a9</a:t>
             </a:r>
             <a:endParaRPr lang="en-US" sz="1200" dirty="0"/>
           </a:p>
@@ -10160,14 +10661,14 @@
       </p:sp>
       <p:sp>
         <p:nvSpPr>
-          <p:cNvPr id="17" name="Text 15"/>
+          <p:cNvPr id="31" name="Text 29"/>
           <p:cNvSpPr txBox="1"/>
           <p:nvPr/>
         </p:nvSpPr>
         <p:spPr>
           <a:xfrm>
-            <a:off x="9326880" y="2377440"/>
-            <a:ext cx="2041855" cy="621792"/>
+            <a:off x="9326880" y="3218688"/>
+            <a:ext cx="2041855" cy="475488"/>
           </a:xfrm>
           <a:prstGeom prst="rect">
             <a:avLst/>
@@ -10191,7 +10692,7 @@
                 <a:ea typeface="Microsoft JhengHei" pitchFamily="34" charset="-122"/>
                 <a:cs typeface="Microsoft JhengHei" pitchFamily="34" charset="-120"/>
               </a:rPr>
-              <a:t>之後才重測，得到 0.899</a:t>
+              <a:t>之後才訓練兩臂</a:t>
             </a:r>
             <a:endParaRPr lang="en-US" sz="1250" dirty="0"/>
           </a:p>
@@ -10199,18 +10700,18 @@
       </p:sp>
       <p:sp>
         <p:nvSpPr>
-          <p:cNvPr id="18" name="Shape 16"/>
+          <p:cNvPr id="32" name="Shape 30"/>
           <p:cNvSpPr/>
           <p:nvPr/>
         </p:nvSpPr>
         <p:spPr>
           <a:xfrm>
-            <a:off x="640080" y="3108960"/>
-            <a:ext cx="10911535" cy="621792"/>
+            <a:off x="640080" y="3767328"/>
+            <a:ext cx="10911535" cy="475488"/>
           </a:xfrm>
           <a:prstGeom prst="roundRect">
             <a:avLst>
-              <a:gd name="adj" fmla="val 14706"/>
+              <a:gd name="adj" fmla="val 19231"/>
             </a:avLst>
           </a:prstGeom>
           <a:solidFill>
@@ -10226,14 +10727,14 @@
       </p:sp>
       <p:sp>
         <p:nvSpPr>
-          <p:cNvPr id="19" name="Shape 17"/>
+          <p:cNvPr id="33" name="Shape 31"/>
           <p:cNvSpPr/>
           <p:nvPr/>
         </p:nvSpPr>
         <p:spPr>
           <a:xfrm>
-            <a:off x="822960" y="3218688"/>
-            <a:ext cx="402336" cy="402336"/>
+            <a:off x="822960" y="3831336"/>
+            <a:ext cx="347472" cy="347472"/>
           </a:xfrm>
           <a:prstGeom prst="ellipse">
             <a:avLst/>
@@ -10246,14 +10747,14 @@
       </p:sp>
       <p:sp>
         <p:nvSpPr>
-          <p:cNvPr id="20" name="Text 18"/>
+          <p:cNvPr id="34" name="Text 32"/>
           <p:cNvSpPr txBox="1"/>
           <p:nvPr/>
         </p:nvSpPr>
         <p:spPr>
           <a:xfrm>
-            <a:off x="822960" y="3218688"/>
-            <a:ext cx="402336" cy="402336"/>
+            <a:off x="822960" y="3831336"/>
+            <a:ext cx="347472" cy="347472"/>
           </a:xfrm>
           <a:prstGeom prst="rect">
             <a:avLst/>
@@ -10269,7 +10770,7 @@
               <a:buNone/>
             </a:pPr>
             <a:r>
-              <a:rPr lang="en-US" sz="1100" b="1" dirty="0">
+              <a:rPr lang="en-US" sz="1000" b="1" dirty="0">
                 <a:solidFill>
                   <a:srgbClr val="FFFFFF"/>
                 </a:solidFill>
@@ -10277,22 +10778,22 @@
                 <a:ea typeface="Microsoft JhengHei" pitchFamily="34" charset="-122"/>
                 <a:cs typeface="Microsoft JhengHei" pitchFamily="34" charset="-120"/>
               </a:rPr>
-              <a:t>3</a:t>
-            </a:r>
-            <a:endParaRPr lang="en-US" sz="1100" dirty="0"/>
-          </a:p>
-        </p:txBody>
-      </p:sp>
-      <p:sp>
-        <p:nvSpPr>
-          <p:cNvPr id="21" name="Text 19"/>
+              <a:t>5</a:t>
+            </a:r>
+            <a:endParaRPr lang="en-US" sz="1000" dirty="0"/>
+          </a:p>
+        </p:txBody>
+      </p:sp>
+      <p:sp>
+        <p:nvSpPr>
+          <p:cNvPr id="35" name="Text 33"/>
           <p:cNvSpPr txBox="1"/>
           <p:nvPr/>
         </p:nvSpPr>
         <p:spPr>
           <a:xfrm>
-            <a:off x="1417320" y="3108960"/>
-            <a:ext cx="1645920" cy="621792"/>
+            <a:off x="1417320" y="3767328"/>
+            <a:ext cx="1645920" cy="475488"/>
           </a:xfrm>
           <a:prstGeom prst="rect">
             <a:avLst/>
@@ -10324,14 +10825,14 @@
       </p:sp>
       <p:sp>
         <p:nvSpPr>
-          <p:cNvPr id="22" name="Text 20"/>
+          <p:cNvPr id="36" name="Text 34"/>
           <p:cNvSpPr txBox="1"/>
           <p:nvPr/>
         </p:nvSpPr>
         <p:spPr>
           <a:xfrm>
-            <a:off x="3108960" y="3108960"/>
-            <a:ext cx="4480560" cy="621792"/>
+            <a:off x="3108960" y="3767328"/>
+            <a:ext cx="4480560" cy="475488"/>
           </a:xfrm>
           <a:prstGeom prst="rect">
             <a:avLst/>
@@ -10363,14 +10864,14 @@
       </p:sp>
       <p:sp>
         <p:nvSpPr>
-          <p:cNvPr id="23" name="Text 21"/>
+          <p:cNvPr id="37" name="Text 35"/>
           <p:cNvSpPr txBox="1"/>
           <p:nvPr/>
         </p:nvSpPr>
         <p:spPr>
           <a:xfrm>
-            <a:off x="7635240" y="3108960"/>
-            <a:ext cx="1645920" cy="621792"/>
+            <a:off x="7635240" y="3767328"/>
+            <a:ext cx="1645920" cy="475488"/>
           </a:xfrm>
           <a:prstGeom prst="rect">
             <a:avLst/>
@@ -10402,14 +10903,14 @@
       </p:sp>
       <p:sp>
         <p:nvSpPr>
-          <p:cNvPr id="24" name="Text 22"/>
+          <p:cNvPr id="38" name="Text 36"/>
           <p:cNvSpPr txBox="1"/>
           <p:nvPr/>
         </p:nvSpPr>
         <p:spPr>
           <a:xfrm>
-            <a:off x="9326880" y="3108960"/>
-            <a:ext cx="2041855" cy="621792"/>
+            <a:off x="9326880" y="3767328"/>
+            <a:ext cx="2041855" cy="475488"/>
           </a:xfrm>
           <a:prstGeom prst="rect">
             <a:avLst/>
@@ -10441,18 +10942,18 @@
       </p:sp>
       <p:sp>
         <p:nvSpPr>
-          <p:cNvPr id="25" name="Shape 23"/>
+          <p:cNvPr id="39" name="Shape 37"/>
           <p:cNvSpPr/>
           <p:nvPr/>
         </p:nvSpPr>
         <p:spPr>
           <a:xfrm>
-            <a:off x="640080" y="3840480"/>
-            <a:ext cx="10911535" cy="621792"/>
+            <a:off x="640080" y="4315968"/>
+            <a:ext cx="10911535" cy="475488"/>
           </a:xfrm>
           <a:prstGeom prst="roundRect">
             <a:avLst>
-              <a:gd name="adj" fmla="val 14706"/>
+              <a:gd name="adj" fmla="val 19231"/>
             </a:avLst>
           </a:prstGeom>
           <a:solidFill>
@@ -10468,14 +10969,14 @@
       </p:sp>
       <p:sp>
         <p:nvSpPr>
-          <p:cNvPr id="26" name="Shape 24"/>
+          <p:cNvPr id="40" name="Shape 38"/>
           <p:cNvSpPr/>
           <p:nvPr/>
         </p:nvSpPr>
         <p:spPr>
           <a:xfrm>
-            <a:off x="822960" y="3950208"/>
-            <a:ext cx="402336" cy="402336"/>
+            <a:off x="822960" y="4379976"/>
+            <a:ext cx="347472" cy="347472"/>
           </a:xfrm>
           <a:prstGeom prst="ellipse">
             <a:avLst/>
@@ -10488,14 +10989,14 @@
       </p:sp>
       <p:sp>
         <p:nvSpPr>
-          <p:cNvPr id="27" name="Text 25"/>
+          <p:cNvPr id="41" name="Text 39"/>
           <p:cNvSpPr txBox="1"/>
           <p:nvPr/>
         </p:nvSpPr>
         <p:spPr>
           <a:xfrm>
-            <a:off x="822960" y="3950208"/>
-            <a:ext cx="402336" cy="402336"/>
+            <a:off x="822960" y="4379976"/>
+            <a:ext cx="347472" cy="347472"/>
           </a:xfrm>
           <a:prstGeom prst="rect">
             <a:avLst/>
@@ -10511,7 +11012,7 @@
               <a:buNone/>
             </a:pPr>
             <a:r>
-              <a:rPr lang="en-US" sz="1100" b="1" dirty="0">
+              <a:rPr lang="en-US" sz="1000" b="1" dirty="0">
                 <a:solidFill>
                   <a:srgbClr val="FFFFFF"/>
                 </a:solidFill>
@@ -10519,22 +11020,22 @@
                 <a:ea typeface="Microsoft JhengHei" pitchFamily="34" charset="-122"/>
                 <a:cs typeface="Microsoft JhengHei" pitchFamily="34" charset="-120"/>
               </a:rPr>
-              <a:t>4</a:t>
-            </a:r>
-            <a:endParaRPr lang="en-US" sz="1100" dirty="0"/>
-          </a:p>
-        </p:txBody>
-      </p:sp>
-      <p:sp>
-        <p:nvSpPr>
-          <p:cNvPr id="28" name="Text 26"/>
+              <a:t>6</a:t>
+            </a:r>
+            <a:endParaRPr lang="en-US" sz="1000" dirty="0"/>
+          </a:p>
+        </p:txBody>
+      </p:sp>
+      <p:sp>
+        <p:nvSpPr>
+          <p:cNvPr id="42" name="Text 40"/>
           <p:cNvSpPr txBox="1"/>
           <p:nvPr/>
         </p:nvSpPr>
         <p:spPr>
           <a:xfrm>
-            <a:off x="1417320" y="3840480"/>
-            <a:ext cx="1645920" cy="621792"/>
+            <a:off x="1417320" y="4315968"/>
+            <a:ext cx="1645920" cy="475488"/>
           </a:xfrm>
           <a:prstGeom prst="rect">
             <a:avLst/>
@@ -10566,14 +11067,14 @@
       </p:sp>
       <p:sp>
         <p:nvSpPr>
-          <p:cNvPr id="29" name="Text 27"/>
+          <p:cNvPr id="43" name="Text 41"/>
           <p:cNvSpPr txBox="1"/>
           <p:nvPr/>
         </p:nvSpPr>
         <p:spPr>
           <a:xfrm>
-            <a:off x="3108960" y="3840480"/>
-            <a:ext cx="4480560" cy="621792"/>
+            <a:off x="3108960" y="4315968"/>
+            <a:ext cx="4480560" cy="475488"/>
           </a:xfrm>
           <a:prstGeom prst="rect">
             <a:avLst/>
@@ -10605,14 +11106,14 @@
       </p:sp>
       <p:sp>
         <p:nvSpPr>
-          <p:cNvPr id="30" name="Text 28"/>
+          <p:cNvPr id="44" name="Text 42"/>
           <p:cNvSpPr txBox="1"/>
           <p:nvPr/>
         </p:nvSpPr>
         <p:spPr>
           <a:xfrm>
-            <a:off x="7635240" y="3840480"/>
-            <a:ext cx="1645920" cy="621792"/>
+            <a:off x="7635240" y="4315968"/>
+            <a:ext cx="1645920" cy="475488"/>
           </a:xfrm>
           <a:prstGeom prst="rect">
             <a:avLst/>
@@ -10644,14 +11145,14 @@
       </p:sp>
       <p:sp>
         <p:nvSpPr>
-          <p:cNvPr id="31" name="Text 29"/>
+          <p:cNvPr id="45" name="Text 43"/>
           <p:cNvSpPr txBox="1"/>
           <p:nvPr/>
         </p:nvSpPr>
         <p:spPr>
           <a:xfrm>
-            <a:off x="9326880" y="3840480"/>
-            <a:ext cx="2041855" cy="621792"/>
+            <a:off x="9326880" y="4315968"/>
+            <a:ext cx="2041855" cy="475488"/>
           </a:xfrm>
           <a:prstGeom prst="rect">
             <a:avLst/>
@@ -10683,18 +11184,18 @@
       </p:sp>
       <p:sp>
         <p:nvSpPr>
-          <p:cNvPr id="32" name="Shape 30"/>
+          <p:cNvPr id="46" name="Shape 44"/>
           <p:cNvSpPr/>
           <p:nvPr/>
         </p:nvSpPr>
         <p:spPr>
           <a:xfrm>
-            <a:off x="640080" y="4572000"/>
-            <a:ext cx="10911535" cy="621792"/>
+            <a:off x="640080" y="4864608"/>
+            <a:ext cx="10911535" cy="475488"/>
           </a:xfrm>
           <a:prstGeom prst="roundRect">
             <a:avLst>
-              <a:gd name="adj" fmla="val 14706"/>
+              <a:gd name="adj" fmla="val 19231"/>
             </a:avLst>
           </a:prstGeom>
           <a:solidFill>
@@ -10710,14 +11211,14 @@
       </p:sp>
       <p:sp>
         <p:nvSpPr>
-          <p:cNvPr id="33" name="Shape 31"/>
+          <p:cNvPr id="47" name="Shape 45"/>
           <p:cNvSpPr/>
           <p:nvPr/>
         </p:nvSpPr>
         <p:spPr>
           <a:xfrm>
-            <a:off x="822960" y="4681728"/>
-            <a:ext cx="402336" cy="402336"/>
+            <a:off x="822960" y="4928616"/>
+            <a:ext cx="347472" cy="347472"/>
           </a:xfrm>
           <a:prstGeom prst="ellipse">
             <a:avLst/>
@@ -10730,14 +11231,14 @@
       </p:sp>
       <p:sp>
         <p:nvSpPr>
-          <p:cNvPr id="34" name="Text 32"/>
+          <p:cNvPr id="48" name="Text 46"/>
           <p:cNvSpPr txBox="1"/>
           <p:nvPr/>
         </p:nvSpPr>
         <p:spPr>
           <a:xfrm>
-            <a:off x="822960" y="4681728"/>
-            <a:ext cx="402336" cy="402336"/>
+            <a:off x="822960" y="4928616"/>
+            <a:ext cx="347472" cy="347472"/>
           </a:xfrm>
           <a:prstGeom prst="rect">
             <a:avLst/>
@@ -10753,7 +11254,7 @@
               <a:buNone/>
             </a:pPr>
             <a:r>
-              <a:rPr lang="en-US" sz="1100" b="1" dirty="0">
+              <a:rPr lang="en-US" sz="1000" b="1" dirty="0">
                 <a:solidFill>
                   <a:srgbClr val="FFFFFF"/>
                 </a:solidFill>
@@ -10761,22 +11262,22 @@
                 <a:ea typeface="Microsoft JhengHei" pitchFamily="34" charset="-122"/>
                 <a:cs typeface="Microsoft JhengHei" pitchFamily="34" charset="-120"/>
               </a:rPr>
-              <a:t>5</a:t>
-            </a:r>
-            <a:endParaRPr lang="en-US" sz="1100" dirty="0"/>
-          </a:p>
-        </p:txBody>
-      </p:sp>
-      <p:sp>
-        <p:nvSpPr>
-          <p:cNvPr id="35" name="Text 33"/>
+              <a:t>7</a:t>
+            </a:r>
+            <a:endParaRPr lang="en-US" sz="1000" dirty="0"/>
+          </a:p>
+        </p:txBody>
+      </p:sp>
+      <p:sp>
+        <p:nvSpPr>
+          <p:cNvPr id="49" name="Text 47"/>
           <p:cNvSpPr txBox="1"/>
           <p:nvPr/>
         </p:nvSpPr>
         <p:spPr>
           <a:xfrm>
-            <a:off x="1417320" y="4572000"/>
-            <a:ext cx="1645920" cy="621792"/>
+            <a:off x="1417320" y="4864608"/>
+            <a:ext cx="1645920" cy="475488"/>
           </a:xfrm>
           <a:prstGeom prst="rect">
             <a:avLst/>
@@ -10808,14 +11309,14 @@
       </p:sp>
       <p:sp>
         <p:nvSpPr>
-          <p:cNvPr id="36" name="Text 34"/>
+          <p:cNvPr id="50" name="Text 48"/>
           <p:cNvSpPr txBox="1"/>
           <p:nvPr/>
         </p:nvSpPr>
         <p:spPr>
           <a:xfrm>
-            <a:off x="3108960" y="4572000"/>
-            <a:ext cx="4480560" cy="621792"/>
+            <a:off x="3108960" y="4864608"/>
+            <a:ext cx="4480560" cy="475488"/>
           </a:xfrm>
           <a:prstGeom prst="rect">
             <a:avLst/>
@@ -10847,14 +11348,14 @@
       </p:sp>
       <p:sp>
         <p:nvSpPr>
-          <p:cNvPr id="37" name="Text 35"/>
+          <p:cNvPr id="51" name="Text 49"/>
           <p:cNvSpPr txBox="1"/>
           <p:nvPr/>
         </p:nvSpPr>
         <p:spPr>
           <a:xfrm>
-            <a:off x="7635240" y="4572000"/>
-            <a:ext cx="1645920" cy="621792"/>
+            <a:off x="7635240" y="4864608"/>
+            <a:ext cx="1645920" cy="475488"/>
           </a:xfrm>
           <a:prstGeom prst="rect">
             <a:avLst/>
@@ -10886,14 +11387,14 @@
       </p:sp>
       <p:sp>
         <p:nvSpPr>
-          <p:cNvPr id="38" name="Text 36"/>
+          <p:cNvPr id="52" name="Text 50"/>
           <p:cNvSpPr txBox="1"/>
           <p:nvPr/>
         </p:nvSpPr>
         <p:spPr>
           <a:xfrm>
-            <a:off x="9326880" y="4572000"/>
-            <a:ext cx="2041855" cy="621792"/>
+            <a:off x="9326880" y="4864608"/>
+            <a:ext cx="2041855" cy="475488"/>
           </a:xfrm>
           <a:prstGeom prst="rect">
             <a:avLst/>
@@ -10925,18 +11426,18 @@
       </p:sp>
       <p:sp>
         <p:nvSpPr>
-          <p:cNvPr id="39" name="Shape 37"/>
+          <p:cNvPr id="53" name="Shape 51"/>
           <p:cNvSpPr/>
           <p:nvPr/>
         </p:nvSpPr>
         <p:spPr>
           <a:xfrm>
-            <a:off x="640080" y="5303520"/>
-            <a:ext cx="10911535" cy="621792"/>
+            <a:off x="640080" y="5413248"/>
+            <a:ext cx="10911535" cy="475488"/>
           </a:xfrm>
           <a:prstGeom prst="roundRect">
             <a:avLst>
-              <a:gd name="adj" fmla="val 14706"/>
+              <a:gd name="adj" fmla="val 19231"/>
             </a:avLst>
           </a:prstGeom>
           <a:solidFill>
@@ -10952,14 +11453,14 @@
       </p:sp>
       <p:sp>
         <p:nvSpPr>
-          <p:cNvPr id="40" name="Shape 38"/>
+          <p:cNvPr id="54" name="Shape 52"/>
           <p:cNvSpPr/>
           <p:nvPr/>
         </p:nvSpPr>
         <p:spPr>
           <a:xfrm>
-            <a:off x="822960" y="5413248"/>
-            <a:ext cx="402336" cy="402336"/>
+            <a:off x="822960" y="5477256"/>
+            <a:ext cx="347472" cy="347472"/>
           </a:xfrm>
           <a:prstGeom prst="ellipse">
             <a:avLst/>
@@ -10972,14 +11473,14 @@
       </p:sp>
       <p:sp>
         <p:nvSpPr>
-          <p:cNvPr id="41" name="Text 39"/>
+          <p:cNvPr id="55" name="Text 53"/>
           <p:cNvSpPr txBox="1"/>
           <p:nvPr/>
         </p:nvSpPr>
         <p:spPr>
           <a:xfrm>
-            <a:off x="822960" y="5413248"/>
-            <a:ext cx="402336" cy="402336"/>
+            <a:off x="822960" y="5477256"/>
+            <a:ext cx="347472" cy="347472"/>
           </a:xfrm>
           <a:prstGeom prst="rect">
             <a:avLst/>
@@ -10995,7 +11496,7 @@
               <a:buNone/>
             </a:pPr>
             <a:r>
-              <a:rPr lang="en-US" sz="1100" b="1" dirty="0">
+              <a:rPr lang="en-US" sz="1000" b="1" dirty="0">
                 <a:solidFill>
                   <a:srgbClr val="FFFFFF"/>
                 </a:solidFill>
@@ -11003,22 +11504,22 @@
                 <a:ea typeface="Microsoft JhengHei" pitchFamily="34" charset="-122"/>
                 <a:cs typeface="Microsoft JhengHei" pitchFamily="34" charset="-120"/>
               </a:rPr>
-              <a:t>6</a:t>
-            </a:r>
-            <a:endParaRPr lang="en-US" sz="1100" dirty="0"/>
-          </a:p>
-        </p:txBody>
-      </p:sp>
-      <p:sp>
-        <p:nvSpPr>
-          <p:cNvPr id="42" name="Text 40"/>
+              <a:t>8</a:t>
+            </a:r>
+            <a:endParaRPr lang="en-US" sz="1000" dirty="0"/>
+          </a:p>
+        </p:txBody>
+      </p:sp>
+      <p:sp>
+        <p:nvSpPr>
+          <p:cNvPr id="56" name="Text 54"/>
           <p:cNvSpPr txBox="1"/>
           <p:nvPr/>
         </p:nvSpPr>
         <p:spPr>
           <a:xfrm>
-            <a:off x="1417320" y="5303520"/>
-            <a:ext cx="1645920" cy="621792"/>
+            <a:off x="1417320" y="5413248"/>
+            <a:ext cx="1645920" cy="475488"/>
           </a:xfrm>
           <a:prstGeom prst="rect">
             <a:avLst/>
@@ -11050,14 +11551,14 @@
       </p:sp>
       <p:sp>
         <p:nvSpPr>
-          <p:cNvPr id="43" name="Text 41"/>
+          <p:cNvPr id="57" name="Text 55"/>
           <p:cNvSpPr txBox="1"/>
           <p:nvPr/>
         </p:nvSpPr>
         <p:spPr>
           <a:xfrm>
-            <a:off x="3108960" y="5303520"/>
-            <a:ext cx="4480560" cy="621792"/>
+            <a:off x="3108960" y="5413248"/>
+            <a:ext cx="4480560" cy="475488"/>
           </a:xfrm>
           <a:prstGeom prst="rect">
             <a:avLst/>
@@ -11089,14 +11590,14 @@
       </p:sp>
       <p:sp>
         <p:nvSpPr>
-          <p:cNvPr id="44" name="Text 42"/>
+          <p:cNvPr id="58" name="Text 56"/>
           <p:cNvSpPr txBox="1"/>
           <p:nvPr/>
         </p:nvSpPr>
         <p:spPr>
           <a:xfrm>
-            <a:off x="7635240" y="5303520"/>
-            <a:ext cx="1645920" cy="621792"/>
+            <a:off x="7635240" y="5413248"/>
+            <a:ext cx="1645920" cy="475488"/>
           </a:xfrm>
           <a:prstGeom prst="rect">
             <a:avLst/>
@@ -11128,14 +11629,14 @@
       </p:sp>
       <p:sp>
         <p:nvSpPr>
-          <p:cNvPr id="45" name="Text 43"/>
+          <p:cNvPr id="59" name="Text 57"/>
           <p:cNvSpPr txBox="1"/>
           <p:nvPr/>
         </p:nvSpPr>
         <p:spPr>
           <a:xfrm>
-            <a:off x="9326880" y="5303520"/>
-            <a:ext cx="2041855" cy="621792"/>
+            <a:off x="9326880" y="5413248"/>
+            <a:ext cx="2041855" cy="475488"/>
           </a:xfrm>
           <a:prstGeom prst="rect">
             <a:avLst/>
@@ -11167,13 +11668,13 @@
       </p:sp>
       <p:sp>
         <p:nvSpPr>
-          <p:cNvPr id="46" name="Text 44"/>
+          <p:cNvPr id="60" name="Text 58"/>
           <p:cNvSpPr txBox="1"/>
           <p:nvPr/>
         </p:nvSpPr>
         <p:spPr>
           <a:xfrm>
-            <a:off x="640080" y="6144768"/>
+            <a:off x="640080" y="6035040"/>
             <a:ext cx="10911535" cy="365760"/>
           </a:xfrm>
           <a:prstGeom prst="rect">
@@ -11957,7 +12458,7 @@
                           <a:ea typeface="Microsoft JhengHei" pitchFamily="34" charset="-122"/>
                           <a:cs typeface="Microsoft JhengHei" pitchFamily="34" charset="-120"/>
                         </a:rPr>
-                        <a:t>那批是摘下的葉子放白紙上拍，跟田間照差很多，而且 150 張只來自二十幾片葉子；加資料的潛葉蛾和沒加資料的油斑病動得一樣多</a:t>
+                        <a:t>那批是摘下的葉子放白紙上拍，跟田間照差很多，而且 124 張只來自約 20–25 片葉子；加資料的潛葉蛾和沒加資料的油斑病動得一樣多</a:t>
                       </a:r>
                       <a:endParaRPr lang="en-US" sz="1200" dirty="0">
                         <a:latin typeface="Microsoft JhengHei" charset="0"/>
@@ -14965,7 +15466,7 @@
                 <a:ea typeface="Microsoft JhengHei" pitchFamily="34" charset="-122"/>
                 <a:cs typeface="Microsoft JhengHei" pitchFamily="34" charset="-120"/>
               </a:rPr>
-              <a:t>進度：四條線分開講</a:t>
+              <a:t>進度：四條線的收斂狀態</a:t>
             </a:r>
             <a:endParaRPr lang="en-US" sz="3200" dirty="0"/>
           </a:p>
@@ -15004,7 +15505,7 @@
                 <a:ea typeface="Microsoft JhengHei" pitchFamily="34" charset="-122"/>
                 <a:cs typeface="Microsoft JhengHei" pitchFamily="34" charset="-120"/>
               </a:rPr>
-              <a:t>混在一起講會失焦</a:t>
+              <a:t>與報告庫的 09-13 週報表 6-1、成果總覽 SUMMARY.md 同一套定義</a:t>
             </a:r>
             <a:endParaRPr lang="en-US" sz="1500" dirty="0"/>
           </a:p>
@@ -15129,7 +15630,7 @@
                 <a:ea typeface="Microsoft JhengHei" pitchFamily="34" charset="-122"/>
                 <a:cs typeface="Microsoft JhengHei" pitchFamily="34" charset="-120"/>
               </a:rPr>
-              <a:t>資料集</a:t>
+              <a:t>模型端</a:t>
             </a:r>
             <a:endParaRPr lang="en-US" sz="1800" dirty="0"/>
           </a:p>
@@ -15143,8 +15644,8 @@
         </p:nvSpPr>
         <p:spPr>
           <a:xfrm>
-            <a:off x="3063240" y="1773936"/>
-            <a:ext cx="8214055" cy="310896"/>
+            <a:off x="3063240" y="1746504"/>
+            <a:ext cx="8214055" cy="347472"/>
           </a:xfrm>
           <a:prstGeom prst="rect">
             <a:avLst/>
@@ -15160,7 +15661,46 @@
               <a:buNone/>
             </a:pPr>
             <a:r>
-              <a:rPr lang="en-US" sz="1300" dirty="0">
+              <a:rPr lang="en-US" sz="1500" b="1" dirty="0">
+                <a:solidFill>
+                  <a:srgbClr val="2C5F45"/>
+                </a:solidFill>
+                <a:latin typeface="Microsoft JhengHei" pitchFamily="34" charset="0"/>
+                <a:ea typeface="Microsoft JhengHei" pitchFamily="34" charset="-122"/>
+                <a:cs typeface="Microsoft JhengHei" pitchFamily="34" charset="-120"/>
+              </a:rPr>
+              <a:t>連續四輪、十一種改動全部無效</a:t>
+            </a:r>
+            <a:endParaRPr lang="en-US" sz="1500" dirty="0"/>
+          </a:p>
+        </p:txBody>
+      </p:sp>
+      <p:sp>
+        <p:nvSpPr>
+          <p:cNvPr id="9" name="Text 7"/>
+          <p:cNvSpPr txBox="1"/>
+          <p:nvPr/>
+        </p:nvSpPr>
+        <p:spPr>
+          <a:xfrm>
+            <a:off x="1600200" y="2139696"/>
+            <a:ext cx="9677095" cy="310896"/>
+          </a:xfrm>
+          <a:prstGeom prst="rect">
+            <a:avLst/>
+          </a:prstGeom>
+          <a:noFill/>
+          <a:ln/>
+        </p:spPr>
+        <p:txBody>
+          <a:bodyPr wrap="square" lIns="0" tIns="0" rIns="0" bIns="0" rtlCol="0" anchor="ctr"/>
+          <a:lstStyle/>
+          <a:p>
+            <a:pPr indent="0" marL="0">
+              <a:buNone/>
+            </a:pPr>
+            <a:r>
+              <a:rPr lang="en-US" sz="1250" dirty="0">
                 <a:solidFill>
                   <a:srgbClr val="5E6F66"/>
                 </a:solidFill>
@@ -15168,48 +15708,9 @@
                 <a:ea typeface="Microsoft JhengHei" pitchFamily="34" charset="-122"/>
                 <a:cs typeface="Microsoft JhengHei" pitchFamily="34" charset="-120"/>
               </a:rPr>
-              <a:t>v5.7：9 類 / train 7,264 / valid 401 / test 401；薊馬葉害依新規則重標</a:t>
-            </a:r>
-            <a:endParaRPr lang="en-US" sz="1300" dirty="0"/>
-          </a:p>
-        </p:txBody>
-      </p:sp>
-      <p:sp>
-        <p:nvSpPr>
-          <p:cNvPr id="9" name="Text 7"/>
-          <p:cNvSpPr txBox="1"/>
-          <p:nvPr/>
-        </p:nvSpPr>
-        <p:spPr>
-          <a:xfrm>
-            <a:off x="1600200" y="2121408"/>
-            <a:ext cx="9677095" cy="329184"/>
-          </a:xfrm>
-          <a:prstGeom prst="rect">
-            <a:avLst/>
-          </a:prstGeom>
-          <a:noFill/>
-          <a:ln/>
-        </p:spPr>
-        <p:txBody>
-          <a:bodyPr wrap="square" lIns="0" tIns="0" rIns="0" bIns="0" rtlCol="0" anchor="ctr"/>
-          <a:lstStyle/>
-          <a:p>
-            <a:pPr indent="0" marL="0">
-              <a:buNone/>
-            </a:pPr>
-            <a:r>
-              <a:rPr lang="en-US" sz="1400" b="1" dirty="0">
-                <a:solidFill>
-                  <a:srgbClr val="2C5F45"/>
-                </a:solidFill>
-                <a:latin typeface="Microsoft JhengHei" pitchFamily="34" charset="0"/>
-                <a:ea typeface="Microsoft JhengHei" pitchFamily="34" charset="-122"/>
-                <a:cs typeface="Microsoft JhengHei" pitchFamily="34" charset="-120"/>
-              </a:rPr>
-              <a:t>量尺維持：九類評估誤差 ±2SE 全部 ≤ 0.10</a:t>
-            </a:r>
-            <a:endParaRPr lang="en-US" sz="1400" dirty="0"/>
+              <a:t>v9 六臂消融零臂通過 2σ 門檻；v12s 放大 3.84 倍參數只換到 +0.003</a:t>
+            </a:r>
+            <a:endParaRPr lang="en-US" sz="1250" dirty="0"/>
           </a:p>
         </p:txBody>
       </p:sp>
@@ -15332,7 +15833,7 @@
                 <a:ea typeface="Microsoft JhengHei" pitchFamily="34" charset="-122"/>
                 <a:cs typeface="Microsoft JhengHei" pitchFamily="34" charset="-120"/>
               </a:rPr>
-              <a:t>模型</a:t>
+              <a:t>訓練協定</a:t>
             </a:r>
             <a:endParaRPr lang="en-US" sz="1800" dirty="0"/>
           </a:p>
@@ -15346,8 +15847,8 @@
         </p:nvSpPr>
         <p:spPr>
           <a:xfrm>
-            <a:off x="3063240" y="2779776"/>
-            <a:ext cx="8214055" cy="310896"/>
+            <a:off x="3063240" y="2752344"/>
+            <a:ext cx="8214055" cy="347472"/>
           </a:xfrm>
           <a:prstGeom prst="rect">
             <a:avLst/>
@@ -15363,7 +15864,46 @@
               <a:buNone/>
             </a:pPr>
             <a:r>
-              <a:rPr lang="en-US" sz="1300" dirty="0">
+              <a:rPr lang="en-US" sz="1500" b="1" dirty="0">
+                <a:solidFill>
+                  <a:srgbClr val="2C5F45"/>
+                </a:solidFill>
+                <a:latin typeface="Microsoft JhengHei" pitchFamily="34" charset="0"/>
+                <a:ea typeface="Microsoft JhengHei" pitchFamily="34" charset="-122"/>
+                <a:cs typeface="Microsoft JhengHei" pitchFamily="34" charset="-120"/>
+              </a:rPr>
+              <a:t>有效，但修的是可報告的評估精度</a:t>
+            </a:r>
+            <a:endParaRPr lang="en-US" sz="1500" dirty="0"/>
+          </a:p>
+        </p:txBody>
+      </p:sp>
+      <p:sp>
+        <p:nvSpPr>
+          <p:cNvPr id="15" name="Text 13"/>
+          <p:cNvSpPr txBox="1"/>
+          <p:nvPr/>
+        </p:nvSpPr>
+        <p:spPr>
+          <a:xfrm>
+            <a:off x="1600200" y="3145536"/>
+            <a:ext cx="9677095" cy="310896"/>
+          </a:xfrm>
+          <a:prstGeom prst="rect">
+            <a:avLst/>
+          </a:prstGeom>
+          <a:noFill/>
+          <a:ln/>
+        </p:spPr>
+        <p:txBody>
+          <a:bodyPr wrap="square" lIns="0" tIns="0" rIns="0" bIns="0" rtlCol="0" anchor="ctr"/>
+          <a:lstStyle/>
+          <a:p>
+            <a:pPr indent="0" marL="0">
+              <a:buNone/>
+            </a:pPr>
+            <a:r>
+              <a:rPr lang="en-US" sz="1250" dirty="0">
                 <a:solidFill>
                   <a:srgbClr val="5E6F66"/>
                 </a:solidFill>
@@ -15371,48 +15911,9 @@
                 <a:ea typeface="Microsoft JhengHei" pitchFamily="34" charset="-122"/>
                 <a:cs typeface="Microsoft JhengHei" pitchFamily="34" charset="-120"/>
               </a:rPr>
-              <a:t>交付換成 v5.7 對照臂 last.pt</a:t>
-            </a:r>
-            <a:endParaRPr lang="en-US" sz="1300" dirty="0"/>
-          </a:p>
-        </p:txBody>
-      </p:sp>
-      <p:sp>
-        <p:nvSpPr>
-          <p:cNvPr id="15" name="Text 13"/>
-          <p:cNvSpPr txBox="1"/>
-          <p:nvPr/>
-        </p:nvSpPr>
-        <p:spPr>
-          <a:xfrm>
-            <a:off x="1600200" y="3127248"/>
-            <a:ext cx="9677095" cy="329184"/>
-          </a:xfrm>
-          <a:prstGeom prst="rect">
-            <a:avLst/>
-          </a:prstGeom>
-          <a:noFill/>
-          <a:ln/>
-        </p:spPr>
-        <p:txBody>
-          <a:bodyPr wrap="square" lIns="0" tIns="0" rIns="0" bIns="0" rtlCol="0" anchor="ctr"/>
-          <a:lstStyle/>
-          <a:p>
-            <a:pPr indent="0" marL="0">
-              <a:buNone/>
-            </a:pPr>
-            <a:r>
-              <a:rPr lang="en-US" sz="1400" b="1" dirty="0">
-                <a:solidFill>
-                  <a:srgbClr val="2C5F45"/>
-                </a:solidFill>
-                <a:latin typeface="Microsoft JhengHei" pitchFamily="34" charset="0"/>
-                <a:ea typeface="Microsoft JhengHei" pitchFamily="34" charset="-122"/>
-                <a:cs typeface="Microsoft JhengHei" pitchFamily="34" charset="-120"/>
-              </a:rPr>
-              <a:t>模型端、資料端都判定完了，沒有不拍照片還能變準的路</a:t>
-            </a:r>
-            <a:endParaRPr lang="en-US" sz="1400" dirty="0"/>
+              <a:t>固定輪數並報 last.pt，valid 可與 test 併計，逐類 ±2SE 最差值 0.140 → 0.099</a:t>
+            </a:r>
+            <a:endParaRPr lang="en-US" sz="1250" dirty="0"/>
           </a:p>
         </p:txBody>
       </p:sp>
@@ -15535,7 +16036,7 @@
                 <a:ea typeface="Microsoft JhengHei" pitchFamily="34" charset="-122"/>
                 <a:cs typeface="Microsoft JhengHei" pitchFamily="34" charset="-120"/>
               </a:rPr>
-              <a:t>部署</a:t>
+              <a:t>部署端</a:t>
             </a:r>
             <a:endParaRPr lang="en-US" sz="1800" dirty="0"/>
           </a:p>
@@ -15549,8 +16050,8 @@
         </p:nvSpPr>
         <p:spPr>
           <a:xfrm>
-            <a:off x="3063240" y="3785616"/>
-            <a:ext cx="8214055" cy="310896"/>
+            <a:off x="3063240" y="3758184"/>
+            <a:ext cx="8214055" cy="347472"/>
           </a:xfrm>
           <a:prstGeom prst="rect">
             <a:avLst/>
@@ -15566,7 +16067,46 @@
               <a:buNone/>
             </a:pPr>
             <a:r>
-              <a:rPr lang="en-US" sz="1300" dirty="0">
+              <a:rPr lang="en-US" sz="1500" b="1" dirty="0">
+                <a:solidFill>
+                  <a:srgbClr val="E8963C"/>
+                </a:solidFill>
+                <a:latin typeface="Microsoft JhengHei" pitchFamily="34" charset="0"/>
+                <a:ea typeface="Microsoft JhengHei" pitchFamily="34" charset="-122"/>
+                <a:cs typeface="Microsoft JhengHei" pitchFamily="34" charset="-120"/>
+              </a:rPr>
+              <a:t>662 不採用；兩台高階裝置在 320 成立——從「不採用」變成「分裝置」</a:t>
+            </a:r>
+            <a:endParaRPr lang="en-US" sz="1500" dirty="0"/>
+          </a:p>
+        </p:txBody>
+      </p:sp>
+      <p:sp>
+        <p:nvSpPr>
+          <p:cNvPr id="21" name="Text 19"/>
+          <p:cNvSpPr txBox="1"/>
+          <p:nvPr/>
+        </p:nvSpPr>
+        <p:spPr>
+          <a:xfrm>
+            <a:off x="1600200" y="4151376"/>
+            <a:ext cx="9677095" cy="310896"/>
+          </a:xfrm>
+          <a:prstGeom prst="rect">
+            <a:avLst/>
+          </a:prstGeom>
+          <a:noFill/>
+          <a:ln/>
+        </p:spPr>
+        <p:txBody>
+          <a:bodyPr wrap="square" lIns="0" tIns="0" rIns="0" bIns="0" rtlCol="0" anchor="ctr"/>
+          <a:lstStyle/>
+          <a:p>
+            <a:pPr indent="0" marL="0">
+              <a:buNone/>
+            </a:pPr>
+            <a:r>
+              <a:rPr lang="en-US" sz="1250" dirty="0">
                 <a:solidFill>
                   <a:srgbClr val="5E6F66"/>
                 </a:solidFill>
@@ -15574,48 +16114,9 @@
                 <a:ea typeface="Microsoft JhengHei" pitchFamily="34" charset="-122"/>
                 <a:cs typeface="Microsoft JhengHei" pitchFamily="34" charset="-120"/>
               </a:rPr>
-              <a:t>662 不做即時辨識；天璣 8300 平板、8 Gen 2 手機 320 可以；三台同一套方法</a:t>
-            </a:r>
-            <a:endParaRPr lang="en-US" sz="1300" dirty="0"/>
-          </a:p>
-        </p:txBody>
-      </p:sp>
-      <p:sp>
-        <p:nvSpPr>
-          <p:cNvPr id="21" name="Text 19"/>
-          <p:cNvSpPr txBox="1"/>
-          <p:nvPr/>
-        </p:nvSpPr>
-        <p:spPr>
-          <a:xfrm>
-            <a:off x="1600200" y="4133088"/>
-            <a:ext cx="9677095" cy="329184"/>
-          </a:xfrm>
-          <a:prstGeom prst="rect">
-            <a:avLst/>
-          </a:prstGeom>
-          <a:noFill/>
-          <a:ln/>
-        </p:spPr>
-        <p:txBody>
-          <a:bodyPr wrap="square" lIns="0" tIns="0" rIns="0" bIns="0" rtlCol="0" anchor="ctr"/>
-          <a:lstStyle/>
-          <a:p>
-            <a:pPr indent="0" marL="0">
-              <a:buNone/>
-            </a:pPr>
-            <a:r>
-              <a:rPr lang="en-US" sz="1400" b="1" dirty="0">
-                <a:solidFill>
-                  <a:srgbClr val="E8963C"/>
-                </a:solidFill>
-                <a:latin typeface="Microsoft JhengHei" pitchFamily="34" charset="0"/>
-                <a:ea typeface="Microsoft JhengHei" pitchFamily="34" charset="-122"/>
-                <a:cs typeface="Microsoft JhengHei" pitchFamily="34" charset="-120"/>
-              </a:rPr>
-              <a:t>從「不採用」變成「分裝置」</a:t>
-            </a:r>
-            <a:endParaRPr lang="en-US" sz="1400" dirty="0"/>
+              <a:t>662 延遲與精度沒有交集；高階裝置 fp32@320 連續跑 38.4 / 29.8 FPS，下一個解析度被持續負載擋下</a:t>
+            </a:r>
+            <a:endParaRPr lang="en-US" sz="1250" dirty="0"/>
           </a:p>
         </p:txBody>
       </p:sp>
@@ -15738,7 +16239,7 @@
                 <a:ea typeface="Microsoft JhengHei" pitchFamily="34" charset="-122"/>
                 <a:cs typeface="Microsoft JhengHei" pitchFamily="34" charset="-120"/>
               </a:rPr>
-              <a:t>人工標註</a:t>
+              <a:t>資料端</a:t>
             </a:r>
             <a:endParaRPr lang="en-US" sz="1800" dirty="0"/>
           </a:p>
@@ -15752,8 +16253,8 @@
         </p:nvSpPr>
         <p:spPr>
           <a:xfrm>
-            <a:off x="3063240" y="4791456"/>
-            <a:ext cx="8214055" cy="310896"/>
+            <a:off x="3063240" y="4764024"/>
+            <a:ext cx="8214055" cy="347472"/>
           </a:xfrm>
           <a:prstGeom prst="rect">
             <a:avLst/>
@@ -15769,7 +16270,46 @@
               <a:buNone/>
             </a:pPr>
             <a:r>
-              <a:rPr lang="en-US" sz="1300" dirty="0">
+              <a:rPr lang="en-US" sz="1500" b="1" dirty="0">
+                <a:solidFill>
+                  <a:srgbClr val="2C5F45"/>
+                </a:solidFill>
+                <a:latin typeface="Microsoft JhengHei" pitchFamily="34" charset="0"/>
+                <a:ea typeface="Microsoft JhengHei" pitchFamily="34" charset="-122"/>
+                <a:cs typeface="Microsoft JhengHei" pitchFamily="34" charset="-120"/>
+              </a:rPr>
+              <a:t>外部影像無效；重標有效但未讓模型變好</a:t>
+            </a:r>
+            <a:endParaRPr lang="en-US" sz="1500" dirty="0"/>
+          </a:p>
+        </p:txBody>
+      </p:sp>
+      <p:sp>
+        <p:nvSpPr>
+          <p:cNvPr id="27" name="Text 25"/>
+          <p:cNvSpPr txBox="1"/>
+          <p:nvPr/>
+        </p:nvSpPr>
+        <p:spPr>
+          <a:xfrm>
+            <a:off x="1600200" y="5157216"/>
+            <a:ext cx="9677095" cy="310896"/>
+          </a:xfrm>
+          <a:prstGeom prst="rect">
+            <a:avLst/>
+          </a:prstGeom>
+          <a:noFill/>
+          <a:ln/>
+        </p:spPr>
+        <p:txBody>
+          <a:bodyPr wrap="square" lIns="0" tIns="0" rIns="0" bIns="0" rtlCol="0" anchor="ctr"/>
+          <a:lstStyle/>
+          <a:p>
+            <a:pPr indent="0" marL="0">
+              <a:buNone/>
+            </a:pPr>
+            <a:r>
+              <a:rPr lang="en-US" sz="1250" dirty="0">
                 <a:solidFill>
                   <a:srgbClr val="5E6F66"/>
                 </a:solidFill>
@@ -15777,48 +16317,9 @@
                 <a:ea typeface="Microsoft JhengHei" pitchFamily="34" charset="-122"/>
                 <a:cs typeface="Microsoft JhengHei" pitchFamily="34" charset="-120"/>
               </a:rPr>
-              <a:t>工作包 A、B 都結案；薊馬葉害全類 208 張已重標</a:t>
-            </a:r>
-            <a:endParaRPr lang="en-US" sz="1300" dirty="0"/>
-          </a:p>
-        </p:txBody>
-      </p:sp>
-      <p:sp>
-        <p:nvSpPr>
-          <p:cNvPr id="27" name="Text 25"/>
-          <p:cNvSpPr txBox="1"/>
-          <p:nvPr/>
-        </p:nvSpPr>
-        <p:spPr>
-          <a:xfrm>
-            <a:off x="1600200" y="5138928"/>
-            <a:ext cx="9677095" cy="329184"/>
-          </a:xfrm>
-          <a:prstGeom prst="rect">
-            <a:avLst/>
-          </a:prstGeom>
-          <a:noFill/>
-          <a:ln/>
-        </p:spPr>
-        <p:txBody>
-          <a:bodyPr wrap="square" lIns="0" tIns="0" rIns="0" bIns="0" rtlCol="0" anchor="ctr"/>
-          <a:lstStyle/>
-          <a:p>
-            <a:pPr indent="0" marL="0">
-              <a:buNone/>
-            </a:pPr>
-            <a:r>
-              <a:rPr lang="en-US" sz="1400" b="1" dirty="0">
-                <a:solidFill>
-                  <a:srgbClr val="2C5F45"/>
-                </a:solidFill>
-                <a:latin typeface="Microsoft JhengHei" pitchFamily="34" charset="0"/>
-                <a:ea typeface="Microsoft JhengHei" pitchFamily="34" charset="-122"/>
-                <a:cs typeface="Microsoft JhengHei" pitchFamily="34" charset="-120"/>
-              </a:rPr>
-              <a:t>從掛了兩週，到兩天內收完</a:t>
-            </a:r>
-            <a:endParaRPr lang="en-US" sz="1400" dirty="0"/>
+              <a:t>外部影像 +0.021；重標後八類平均 −0.002；工作包 A、B 都已結案</a:t>
+            </a:r>
+            <a:endParaRPr lang="en-US" sz="1250" dirty="0"/>
           </a:p>
         </p:txBody>
       </p:sp>
@@ -15855,7 +16356,7 @@
                 <a:ea typeface="Microsoft JhengHei" pitchFamily="34" charset="-122"/>
                 <a:cs typeface="Microsoft JhengHei" pitchFamily="34" charset="-120"/>
               </a:rPr>
-              <a:t>本週最大的變化在部署：上週只有一台入門機的「做不到」，這週有三台、同一套方法、分裝置的結論。</a:t>
+              <a:t>四條線都被預先登記的判準關閉；兩個有效的手段修的是「數字能不能被相信」，沒有一個讓模型變好。</a:t>
             </a:r>
             <a:endParaRPr lang="en-US" sz="1400" dirty="0"/>
           </a:p>
@@ -15926,7 +16427,7 @@
                 <a:ea typeface="Microsoft JhengHei" pitchFamily="34" charset="-122"/>
                 <a:cs typeface="Microsoft JhengHei" pitchFamily="34" charset="-120"/>
               </a:rPr>
-              <a:t>本期的五個判定</a:t>
+              <a:t>本期回答的七個問題</a:t>
             </a:r>
             <a:endParaRPr lang="en-US" sz="3200" dirty="0"/>
           </a:p>
@@ -15965,7 +16466,7 @@
                 <a:ea typeface="Microsoft JhengHei" pitchFamily="34" charset="-122"/>
                 <a:cs typeface="Microsoft JhengHei" pitchFamily="34" charset="-120"/>
               </a:rPr>
-              <a:t>每一個的標準都寫在量測之前，沒有一個是看完結果才決定怎麼算</a:t>
+              <a:t>兩輪標註、兩台高階裝置各併成一列　·　每一個的標準都寫在量測之前，沒有一個是看完結果才決定怎麼算</a:t>
             </a:r>
             <a:endParaRPr lang="en-US" sz="1500" dirty="0"/>
           </a:p>
@@ -17987,7 +18488,7 @@
         <p:spPr>
           <a:xfrm>
             <a:off x="7360920" y="3383280"/>
-            <a:ext cx="3916375" cy="621792"/>
+            <a:ext cx="3916375" cy="475488"/>
           </a:xfrm>
           <a:prstGeom prst="rect">
             <a:avLst/>
@@ -19457,7 +19958,7 @@
                 <a:ea typeface="Microsoft JhengHei" pitchFamily="34" charset="-122"/>
                 <a:cs typeface="Microsoft JhengHei" pitchFamily="34" charset="-120"/>
               </a:rPr>
-              <a:t>平板 1.7 倍、手機 1.05–1.4 倍、662 不掉。只看短時間的數字，會以為高階機的下一個解析度也可以做即時辨識。</a:t>
+              <a:t>平板 1.6–1.7 倍、手機 1.05–1.4 倍、662 不掉。只看短時間的數字，會以為高階機的下一個解析度也可以做即時辨識。</a:t>
             </a:r>
             <a:endParaRPr lang="en-US" sz="1350" dirty="0"/>
           </a:p>
@@ -19602,7 +20103,7 @@
         <p:spPr>
           <a:xfrm>
             <a:off x="1508760" y="1042416"/>
-            <a:ext cx="10042855" cy="621792"/>
+            <a:ext cx="10042855" cy="475488"/>
           </a:xfrm>
           <a:prstGeom prst="rect">
             <a:avLst/>

--- a/docs/v12.3_簡報_口頭報告.pptx
+++ b/docs/v12.3_簡報_口頭報告.pptx
@@ -3050,7 +3050,7 @@
           <a:p>
             <a:r>
               <a:rPr lang="en-US" dirty="0"/>
-              <a:t>【約 45 秒】三個數字講完就往下走，不要在這裡展開。0.899 是標註、−0.002 是模型、38/30/16 是部署，後面各有一頁。</a:t>
+              <a:t>【約 45 秒】三個數字講完就往下走，不要在這裡展開。5 → 0 是標註（兩人框數不一致的照片數。刻意不放 0.899：那是畫框重疊度、不是準確度，放成大數字容易被誤讀）、−0.002 是模型、38/30/16 是部署，後面各有一頁。</a:t>
             </a:r>
             <a:endParaRPr lang="en-US" dirty="0"/>
           </a:p>
@@ -12129,6 +12129,138 @@
                           <a:ea typeface="Microsoft JhengHei" pitchFamily="34" charset="-122"/>
                           <a:cs typeface="Microsoft JhengHei" pitchFamily="34" charset="-120"/>
                         </a:rPr>
+                        <a:t>0.899 是模型的準確度嗎？</a:t>
+                      </a:r>
+                      <a:endParaRPr lang="en-US" sz="1200" dirty="0">
+                        <a:latin typeface="Microsoft JhengHei" charset="0"/>
+                        <a:ea typeface="Microsoft JhengHei" charset="0"/>
+                        <a:cs typeface="Microsoft JhengHei" charset="0"/>
+                      </a:endParaRPr>
+                    </a:p>
+                  </a:txBody>
+                  <a:tcPr marL="91440" marR="91440" marT="45720" marB="45720" anchor="ctr">
+                    <a:lnL w="6350" cap="flat" cmpd="sng" algn="ctr">
+                      <a:solidFill>
+                        <a:srgbClr val="C9DCD0"/>
+                      </a:solidFill>
+                      <a:prstDash val="solid"/>
+                      <a:round/>
+                      <a:headEnd type="none" w="med" len="med"/>
+                      <a:tailEnd type="none" w="med" len="med"/>
+                    </a:lnL>
+                    <a:lnR w="6350" cap="flat" cmpd="sng" algn="ctr">
+                      <a:solidFill>
+                        <a:srgbClr val="C9DCD0"/>
+                      </a:solidFill>
+                      <a:prstDash val="solid"/>
+                      <a:round/>
+                      <a:headEnd type="none" w="med" len="med"/>
+                      <a:tailEnd type="none" w="med" len="med"/>
+                    </a:lnR>
+                    <a:lnT w="6350" cap="flat" cmpd="sng" algn="ctr">
+                      <a:solidFill>
+                        <a:srgbClr val="C9DCD0"/>
+                      </a:solidFill>
+                      <a:prstDash val="solid"/>
+                      <a:round/>
+                      <a:headEnd type="none" w="med" len="med"/>
+                      <a:tailEnd type="none" w="med" len="med"/>
+                    </a:lnT>
+                    <a:lnB w="6350" cap="flat" cmpd="sng" algn="ctr">
+                      <a:solidFill>
+                        <a:srgbClr val="C9DCD0"/>
+                      </a:solidFill>
+                      <a:prstDash val="solid"/>
+                      <a:round/>
+                      <a:headEnd type="none" w="med" len="med"/>
+                      <a:tailEnd type="none" w="med" len="med"/>
+                    </a:lnB>
+                  </a:tcPr>
+                </a:tc>
+                <a:tc>
+                  <a:txBody>
+                    <a:bodyPr/>
+                    <a:lstStyle/>
+                    <a:p>
+                      <a:pPr algn="l" indent="0" marL="0">
+                        <a:buNone/>
+                      </a:pPr>
+                      <a:r>
+                        <a:rPr lang="en-US" sz="1200" dirty="0">
+                          <a:solidFill>
+                            <a:srgbClr val="1A2620"/>
+                          </a:solidFill>
+                          <a:latin typeface="Microsoft JhengHei" pitchFamily="34" charset="0"/>
+                          <a:ea typeface="Microsoft JhengHei" pitchFamily="34" charset="-122"/>
+                          <a:cs typeface="Microsoft JhengHei" pitchFamily="34" charset="-120"/>
+                        </a:rPr>
+                        <a:t>不是。那是兩個人各自畫框的重疊度（IoU 中位數），用來判斷標註規則畫不畫得一致，和模型無關</a:t>
+                      </a:r>
+                      <a:endParaRPr lang="en-US" sz="1200" dirty="0">
+                        <a:latin typeface="Microsoft JhengHei" charset="0"/>
+                        <a:ea typeface="Microsoft JhengHei" charset="0"/>
+                        <a:cs typeface="Microsoft JhengHei" charset="0"/>
+                      </a:endParaRPr>
+                    </a:p>
+                  </a:txBody>
+                  <a:tcPr marL="91440" marR="91440" marT="45720" marB="45720" anchor="ctr">
+                    <a:lnL w="6350" cap="flat" cmpd="sng" algn="ctr">
+                      <a:solidFill>
+                        <a:srgbClr val="C9DCD0"/>
+                      </a:solidFill>
+                      <a:prstDash val="solid"/>
+                      <a:round/>
+                      <a:headEnd type="none" w="med" len="med"/>
+                      <a:tailEnd type="none" w="med" len="med"/>
+                    </a:lnL>
+                    <a:lnR w="6350" cap="flat" cmpd="sng" algn="ctr">
+                      <a:solidFill>
+                        <a:srgbClr val="C9DCD0"/>
+                      </a:solidFill>
+                      <a:prstDash val="solid"/>
+                      <a:round/>
+                      <a:headEnd type="none" w="med" len="med"/>
+                      <a:tailEnd type="none" w="med" len="med"/>
+                    </a:lnR>
+                    <a:lnT w="6350" cap="flat" cmpd="sng" algn="ctr">
+                      <a:solidFill>
+                        <a:srgbClr val="C9DCD0"/>
+                      </a:solidFill>
+                      <a:prstDash val="solid"/>
+                      <a:round/>
+                      <a:headEnd type="none" w="med" len="med"/>
+                      <a:tailEnd type="none" w="med" len="med"/>
+                    </a:lnT>
+                    <a:lnB w="6350" cap="flat" cmpd="sng" algn="ctr">
+                      <a:solidFill>
+                        <a:srgbClr val="C9DCD0"/>
+                      </a:solidFill>
+                      <a:prstDash val="solid"/>
+                      <a:round/>
+                      <a:headEnd type="none" w="med" len="med"/>
+                      <a:tailEnd type="none" w="med" len="med"/>
+                    </a:lnB>
+                  </a:tcPr>
+                </a:tc>
+              </a:tr>
+              <a:tr h="585216">
+                <a:tc>
+                  <a:txBody>
+                    <a:bodyPr/>
+                    <a:lstStyle/>
+                    <a:p>
+                      <a:pPr algn="l" indent="0" marL="0">
+                        <a:buNone/>
+                      </a:pPr>
+                      <a:r>
+                        <a:rPr lang="en-US" sz="1200" b="1" dirty="0">
+                          <a:solidFill>
+                            <a:srgbClr val="0F2E22"/>
+                          </a:solidFill>
+                          <a:latin typeface="Microsoft JhengHei" pitchFamily="34" charset="0"/>
+                          <a:ea typeface="Microsoft JhengHei" pitchFamily="34" charset="-122"/>
+                          <a:cs typeface="Microsoft JhengHei" pitchFamily="34" charset="-120"/>
+                        </a:rPr>
                         <a:t>那為什麼要換成 v5.7？</a:t>
                       </a:r>
                       <a:endParaRPr lang="en-US" sz="1200" dirty="0">
@@ -12723,138 +12855,6 @@
                           <a:cs typeface="Microsoft JhengHei" pitchFamily="34" charset="-120"/>
                         </a:rPr>
                         <a:t>標準是 40 ms（25 FPS）；手機連續跑最慢的一段是 33.5 ms，還有 6.5 ms 餘裕</a:t>
-                      </a:r>
-                      <a:endParaRPr lang="en-US" sz="1200" dirty="0">
-                        <a:latin typeface="Microsoft JhengHei" charset="0"/>
-                        <a:ea typeface="Microsoft JhengHei" charset="0"/>
-                        <a:cs typeface="Microsoft JhengHei" charset="0"/>
-                      </a:endParaRPr>
-                    </a:p>
-                  </a:txBody>
-                  <a:tcPr marL="91440" marR="91440" marT="45720" marB="45720" anchor="ctr">
-                    <a:lnL w="6350" cap="flat" cmpd="sng" algn="ctr">
-                      <a:solidFill>
-                        <a:srgbClr val="C9DCD0"/>
-                      </a:solidFill>
-                      <a:prstDash val="solid"/>
-                      <a:round/>
-                      <a:headEnd type="none" w="med" len="med"/>
-                      <a:tailEnd type="none" w="med" len="med"/>
-                    </a:lnL>
-                    <a:lnR w="6350" cap="flat" cmpd="sng" algn="ctr">
-                      <a:solidFill>
-                        <a:srgbClr val="C9DCD0"/>
-                      </a:solidFill>
-                      <a:prstDash val="solid"/>
-                      <a:round/>
-                      <a:headEnd type="none" w="med" len="med"/>
-                      <a:tailEnd type="none" w="med" len="med"/>
-                    </a:lnR>
-                    <a:lnT w="6350" cap="flat" cmpd="sng" algn="ctr">
-                      <a:solidFill>
-                        <a:srgbClr val="C9DCD0"/>
-                      </a:solidFill>
-                      <a:prstDash val="solid"/>
-                      <a:round/>
-                      <a:headEnd type="none" w="med" len="med"/>
-                      <a:tailEnd type="none" w="med" len="med"/>
-                    </a:lnT>
-                    <a:lnB w="6350" cap="flat" cmpd="sng" algn="ctr">
-                      <a:solidFill>
-                        <a:srgbClr val="C9DCD0"/>
-                      </a:solidFill>
-                      <a:prstDash val="solid"/>
-                      <a:round/>
-                      <a:headEnd type="none" w="med" len="med"/>
-                      <a:tailEnd type="none" w="med" len="med"/>
-                    </a:lnB>
-                  </a:tcPr>
-                </a:tc>
-              </a:tr>
-              <a:tr h="585216">
-                <a:tc>
-                  <a:txBody>
-                    <a:bodyPr/>
-                    <a:lstStyle/>
-                    <a:p>
-                      <a:pPr algn="l" indent="0" marL="0">
-                        <a:buNone/>
-                      </a:pPr>
-                      <a:r>
-                        <a:rPr lang="en-US" sz="1200" b="1" dirty="0">
-                          <a:solidFill>
-                            <a:srgbClr val="0F2E22"/>
-                          </a:solidFill>
-                          <a:latin typeface="Microsoft JhengHei" pitchFamily="34" charset="0"/>
-                          <a:ea typeface="Microsoft JhengHei" pitchFamily="34" charset="-122"/>
-                          <a:cs typeface="Microsoft JhengHei" pitchFamily="34" charset="-120"/>
-                        </a:rPr>
-                        <a:t>8 Gen 2 比天璣 8300 強，手機為何較慢？</a:t>
-                      </a:r>
-                      <a:endParaRPr lang="en-US" sz="1200" dirty="0">
-                        <a:latin typeface="Microsoft JhengHei" charset="0"/>
-                        <a:ea typeface="Microsoft JhengHei" charset="0"/>
-                        <a:cs typeface="Microsoft JhengHei" charset="0"/>
-                      </a:endParaRPr>
-                    </a:p>
-                  </a:txBody>
-                  <a:tcPr marL="91440" marR="91440" marT="45720" marB="45720" anchor="ctr">
-                    <a:lnL w="6350" cap="flat" cmpd="sng" algn="ctr">
-                      <a:solidFill>
-                        <a:srgbClr val="C9DCD0"/>
-                      </a:solidFill>
-                      <a:prstDash val="solid"/>
-                      <a:round/>
-                      <a:headEnd type="none" w="med" len="med"/>
-                      <a:tailEnd type="none" w="med" len="med"/>
-                    </a:lnL>
-                    <a:lnR w="6350" cap="flat" cmpd="sng" algn="ctr">
-                      <a:solidFill>
-                        <a:srgbClr val="C9DCD0"/>
-                      </a:solidFill>
-                      <a:prstDash val="solid"/>
-                      <a:round/>
-                      <a:headEnd type="none" w="med" len="med"/>
-                      <a:tailEnd type="none" w="med" len="med"/>
-                    </a:lnR>
-                    <a:lnT w="6350" cap="flat" cmpd="sng" algn="ctr">
-                      <a:solidFill>
-                        <a:srgbClr val="C9DCD0"/>
-                      </a:solidFill>
-                      <a:prstDash val="solid"/>
-                      <a:round/>
-                      <a:headEnd type="none" w="med" len="med"/>
-                      <a:tailEnd type="none" w="med" len="med"/>
-                    </a:lnT>
-                    <a:lnB w="6350" cap="flat" cmpd="sng" algn="ctr">
-                      <a:solidFill>
-                        <a:srgbClr val="C9DCD0"/>
-                      </a:solidFill>
-                      <a:prstDash val="solid"/>
-                      <a:round/>
-                      <a:headEnd type="none" w="med" len="med"/>
-                      <a:tailEnd type="none" w="med" len="med"/>
-                    </a:lnB>
-                  </a:tcPr>
-                </a:tc>
-                <a:tc>
-                  <a:txBody>
-                    <a:bodyPr/>
-                    <a:lstStyle/>
-                    <a:p>
-                      <a:pPr algn="l" indent="0" marL="0">
-                        <a:buNone/>
-                      </a:pPr>
-                      <a:r>
-                        <a:rPr lang="en-US" sz="1200" dirty="0">
-                          <a:solidFill>
-                            <a:srgbClr val="1A2620"/>
-                          </a:solidFill>
-                          <a:latin typeface="Microsoft JhengHei" pitchFamily="34" charset="0"/>
-                          <a:ea typeface="Microsoft JhengHei" pitchFamily="34" charset="-122"/>
-                          <a:cs typeface="Microsoft JhengHei" pitchFamily="34" charset="-120"/>
-                        </a:rPr>
-                        <a:t>這支手機閒置時 CPU 頻率上限就被壓在一半左右，來源沒查到；照出廠狀態量、不改系統設定，結論只代表這支手機</a:t>
                       </a:r>
                       <a:endParaRPr lang="en-US" sz="1200" dirty="0">
                         <a:latin typeface="Microsoft JhengHei" charset="0"/>
@@ -13032,7 +13032,7 @@
           </p:nvPr>
         </p:nvGraphicFramePr>
         <p:xfrm>
-          <a:off x="640080" y="1645920"/>
+          <a:off x="640080" y="1554480"/>
           <a:ext cx="10911535" cy="914400"/>
         </p:xfrm>
         <a:graphic>
@@ -13043,7 +13043,7 @@
                 <a:gridCol w="3749040"/>
                 <a:gridCol w="7162495"/>
               </a:tblGrid>
-              <a:tr h="585216">
+              <a:tr h="530352">
                 <a:tc>
                   <a:txBody>
                     <a:bodyPr/>
@@ -13181,7 +13181,139 @@
                   </a:tcPr>
                 </a:tc>
               </a:tr>
-              <a:tr h="585216">
+              <a:tr h="530352">
+                <a:tc>
+                  <a:txBody>
+                    <a:bodyPr/>
+                    <a:lstStyle/>
+                    <a:p>
+                      <a:pPr algn="l" indent="0" marL="0">
+                        <a:buNone/>
+                      </a:pPr>
+                      <a:r>
+                        <a:rPr lang="en-US" sz="1200" b="1" dirty="0">
+                          <a:solidFill>
+                            <a:srgbClr val="0F2E22"/>
+                          </a:solidFill>
+                          <a:latin typeface="Microsoft JhengHei" pitchFamily="34" charset="0"/>
+                          <a:ea typeface="Microsoft JhengHei" pitchFamily="34" charset="-122"/>
+                          <a:cs typeface="Microsoft JhengHei" pitchFamily="34" charset="-120"/>
+                        </a:rPr>
+                        <a:t>8 Gen 2 比天璣 8300 強，手機為何較慢？</a:t>
+                      </a:r>
+                      <a:endParaRPr lang="en-US" sz="1200" dirty="0">
+                        <a:latin typeface="Microsoft JhengHei" charset="0"/>
+                        <a:ea typeface="Microsoft JhengHei" charset="0"/>
+                        <a:cs typeface="Microsoft JhengHei" charset="0"/>
+                      </a:endParaRPr>
+                    </a:p>
+                  </a:txBody>
+                  <a:tcPr marL="91440" marR="91440" marT="45720" marB="45720" anchor="ctr">
+                    <a:lnL w="6350" cap="flat" cmpd="sng" algn="ctr">
+                      <a:solidFill>
+                        <a:srgbClr val="C9DCD0"/>
+                      </a:solidFill>
+                      <a:prstDash val="solid"/>
+                      <a:round/>
+                      <a:headEnd type="none" w="med" len="med"/>
+                      <a:tailEnd type="none" w="med" len="med"/>
+                    </a:lnL>
+                    <a:lnR w="6350" cap="flat" cmpd="sng" algn="ctr">
+                      <a:solidFill>
+                        <a:srgbClr val="C9DCD0"/>
+                      </a:solidFill>
+                      <a:prstDash val="solid"/>
+                      <a:round/>
+                      <a:headEnd type="none" w="med" len="med"/>
+                      <a:tailEnd type="none" w="med" len="med"/>
+                    </a:lnR>
+                    <a:lnT w="6350" cap="flat" cmpd="sng" algn="ctr">
+                      <a:solidFill>
+                        <a:srgbClr val="C9DCD0"/>
+                      </a:solidFill>
+                      <a:prstDash val="solid"/>
+                      <a:round/>
+                      <a:headEnd type="none" w="med" len="med"/>
+                      <a:tailEnd type="none" w="med" len="med"/>
+                    </a:lnT>
+                    <a:lnB w="6350" cap="flat" cmpd="sng" algn="ctr">
+                      <a:solidFill>
+                        <a:srgbClr val="C9DCD0"/>
+                      </a:solidFill>
+                      <a:prstDash val="solid"/>
+                      <a:round/>
+                      <a:headEnd type="none" w="med" len="med"/>
+                      <a:tailEnd type="none" w="med" len="med"/>
+                    </a:lnB>
+                  </a:tcPr>
+                </a:tc>
+                <a:tc>
+                  <a:txBody>
+                    <a:bodyPr/>
+                    <a:lstStyle/>
+                    <a:p>
+                      <a:pPr algn="l" indent="0" marL="0">
+                        <a:buNone/>
+                      </a:pPr>
+                      <a:r>
+                        <a:rPr lang="en-US" sz="1200" dirty="0">
+                          <a:solidFill>
+                            <a:srgbClr val="1A2620"/>
+                          </a:solidFill>
+                          <a:latin typeface="Microsoft JhengHei" pitchFamily="34" charset="0"/>
+                          <a:ea typeface="Microsoft JhengHei" pitchFamily="34" charset="-122"/>
+                          <a:cs typeface="Microsoft JhengHei" pitchFamily="34" charset="-120"/>
+                        </a:rPr>
+                        <a:t>這支手機閒置時 CPU 頻率上限就被壓在一半左右，來源沒查到；照出廠狀態量、不改系統設定，結論只代表這支手機</a:t>
+                      </a:r>
+                      <a:endParaRPr lang="en-US" sz="1200" dirty="0">
+                        <a:latin typeface="Microsoft JhengHei" charset="0"/>
+                        <a:ea typeface="Microsoft JhengHei" charset="0"/>
+                        <a:cs typeface="Microsoft JhengHei" charset="0"/>
+                      </a:endParaRPr>
+                    </a:p>
+                  </a:txBody>
+                  <a:tcPr marL="91440" marR="91440" marT="45720" marB="45720" anchor="ctr">
+                    <a:lnL w="6350" cap="flat" cmpd="sng" algn="ctr">
+                      <a:solidFill>
+                        <a:srgbClr val="C9DCD0"/>
+                      </a:solidFill>
+                      <a:prstDash val="solid"/>
+                      <a:round/>
+                      <a:headEnd type="none" w="med" len="med"/>
+                      <a:tailEnd type="none" w="med" len="med"/>
+                    </a:lnL>
+                    <a:lnR w="6350" cap="flat" cmpd="sng" algn="ctr">
+                      <a:solidFill>
+                        <a:srgbClr val="C9DCD0"/>
+                      </a:solidFill>
+                      <a:prstDash val="solid"/>
+                      <a:round/>
+                      <a:headEnd type="none" w="med" len="med"/>
+                      <a:tailEnd type="none" w="med" len="med"/>
+                    </a:lnR>
+                    <a:lnT w="6350" cap="flat" cmpd="sng" algn="ctr">
+                      <a:solidFill>
+                        <a:srgbClr val="C9DCD0"/>
+                      </a:solidFill>
+                      <a:prstDash val="solid"/>
+                      <a:round/>
+                      <a:headEnd type="none" w="med" len="med"/>
+                      <a:tailEnd type="none" w="med" len="med"/>
+                    </a:lnT>
+                    <a:lnB w="6350" cap="flat" cmpd="sng" algn="ctr">
+                      <a:solidFill>
+                        <a:srgbClr val="C9DCD0"/>
+                      </a:solidFill>
+                      <a:prstDash val="solid"/>
+                      <a:round/>
+                      <a:headEnd type="none" w="med" len="med"/>
+                      <a:tailEnd type="none" w="med" len="med"/>
+                    </a:lnB>
+                  </a:tcPr>
+                </a:tc>
+              </a:tr>
+              <a:tr h="530352">
                 <a:tc>
                   <a:txBody>
                     <a:bodyPr/>
@@ -13313,7 +13445,7 @@
                   </a:tcPr>
                 </a:tc>
               </a:tr>
-              <a:tr h="585216">
+              <a:tr h="530352">
                 <a:tc>
                   <a:txBody>
                     <a:bodyPr/>
@@ -13445,7 +13577,7 @@
                   </a:tcPr>
                 </a:tc>
               </a:tr>
-              <a:tr h="585216">
+              <a:tr h="530352">
                 <a:tc>
                   <a:txBody>
                     <a:bodyPr/>
@@ -13577,7 +13709,7 @@
                   </a:tcPr>
                 </a:tc>
               </a:tr>
-              <a:tr h="585216">
+              <a:tr h="530352">
                 <a:tc>
                   <a:txBody>
                     <a:bodyPr/>
@@ -13709,7 +13841,7 @@
                   </a:tcPr>
                 </a:tc>
               </a:tr>
-              <a:tr h="585216">
+              <a:tr h="530352">
                 <a:tc>
                   <a:txBody>
                     <a:bodyPr/>
@@ -13841,7 +13973,7 @@
                   </a:tcPr>
                 </a:tc>
               </a:tr>
-              <a:tr h="585216">
+              <a:tr h="530352">
                 <a:tc>
                   <a:txBody>
                     <a:bodyPr/>
@@ -13973,7 +14105,7 @@
                   </a:tcPr>
                 </a:tc>
               </a:tr>
-              <a:tr h="585216">
+              <a:tr h="530352">
                 <a:tc>
                   <a:txBody>
                     <a:bodyPr/>
@@ -14881,11 +15013,22 @@
                 <a:ea typeface="Microsoft JhengHei" pitchFamily="34" charset="-122"/>
                 <a:cs typeface="Microsoft JhengHei" pitchFamily="34" charset="-120"/>
               </a:rPr>
-              <a:t>0.899</a:t>
+              <a:t>5 → 0</a:t>
             </a:r>
             <a:pPr algn="l" indent="0" marL="0">
               <a:buNone/>
             </a:pPr>
+            <a:r>
+              <a:rPr lang="en-US" sz="2000" b="1" dirty="0">
+                <a:solidFill>
+                  <a:srgbClr val="2C5F45"/>
+                </a:solidFill>
+                <a:latin typeface="Microsoft JhengHei" pitchFamily="34" charset="0"/>
+                <a:ea typeface="Microsoft JhengHei" pitchFamily="34" charset="-122"/>
+                <a:cs typeface="Microsoft JhengHei" pitchFamily="34" charset="-120"/>
+              </a:rPr>
+              <a:t> 張</a:t>
+            </a:r>
             <a:endParaRPr lang="en-US" sz="5400" dirty="0"/>
           </a:p>
         </p:txBody>
@@ -14923,7 +15066,7 @@
                 <a:ea typeface="Microsoft JhengHei" pitchFamily="34" charset="-122"/>
                 <a:cs typeface="Microsoft JhengHei" pitchFamily="34" charset="-120"/>
               </a:rPr>
-              <a:t>薊馬葉害改成「一張葉子一個框」後，兩個人畫框的一致性</a:t>
+              <a:t>薊馬葉害兩人各標同樣 20 張，框數不一致的照片數</a:t>
             </a:r>
             <a:endParaRPr lang="en-US" sz="1400" dirty="0"/>
           </a:p>
@@ -14982,7 +15125,24 @@
                 <a:ea typeface="Microsoft JhengHei" pitchFamily="34" charset="-122"/>
                 <a:cs typeface="Microsoft JhengHei" pitchFamily="34" charset="-120"/>
               </a:rPr>
-              <a:t>門檻 0.85（舊規則只有 0.746）</a:t>
+              <a:t>改成一張葉子一個框後分歧消失</a:t>
+            </a:r>
+            <a:endParaRPr lang="en-US" sz="1400" dirty="0"/>
+          </a:p>
+          <a:p>
+            <a:pPr indent="0" marL="0">
+              <a:buNone/>
+            </a:pPr>
+            <a:r>
+              <a:rPr lang="en-US" sz="1400" b="1" dirty="0">
+                <a:solidFill>
+                  <a:srgbClr val="2C5F45"/>
+                </a:solidFill>
+                <a:latin typeface="Microsoft JhengHei" pitchFamily="34" charset="0"/>
+                <a:ea typeface="Microsoft JhengHei" pitchFamily="34" charset="-122"/>
+                <a:cs typeface="Microsoft JhengHei" pitchFamily="34" charset="-120"/>
+              </a:rPr>
+              <a:t>兩人畫框重疊度 0.746 → 0.899</a:t>
             </a:r>
             <a:endParaRPr lang="en-US" sz="1400" dirty="0"/>
           </a:p>

--- a/docs/v12.3_簡報_口頭報告.pptx
+++ b/docs/v12.3_簡報_口頭報告.pptx
@@ -147,7 +147,7 @@
               <c:strCache>
                 <c:ptCount val="1"/>
                 <c:pt idx="0">
-                  <c:v>v11.5（v5.6，舊標註）</c:v>
+                  <c:v>v11.5（v5.6 資料集，舊標註）</c:v>
                 </c:pt>
               </c:strCache>
             </c:strRef>
@@ -230,7 +230,7 @@
               <c:strCache>
                 <c:ptCount val="1"/>
                 <c:pt idx="0">
-                  <c:v>v5.7（新標註）</c:v>
+                  <c:v>v11.5（v5.7 資料集，新標註）</c:v>
                 </c:pt>
               </c:strCache>
             </c:strRef>
@@ -836,7 +836,7 @@
               <c:strCache>
                 <c:ptCount val="1"/>
                 <c:pt idx="0">
-                  <c:v>平板 512</c:v>
+                  <c:v>平板 416</c:v>
                 </c:pt>
               </c:strCache>
             </c:strRef>
@@ -943,34 +943,34 @@
                 <c:formatCode>General</c:formatCode>
                 <c:ptCount val="10"/>
                 <c:pt idx="0">
-                  <c:v>46.43</c:v>
+                  <c:v>31.64</c:v>
                 </c:pt>
                 <c:pt idx="1">
-                  <c:v>52.86</c:v>
+                  <c:v>34.01</c:v>
                 </c:pt>
                 <c:pt idx="2">
-                  <c:v>55.44</c:v>
+                  <c:v>35.83</c:v>
                 </c:pt>
                 <c:pt idx="3">
-                  <c:v>59.43</c:v>
+                  <c:v>36.93</c:v>
                 </c:pt>
                 <c:pt idx="4">
-                  <c:v>60.82</c:v>
+                  <c:v>37.72</c:v>
                 </c:pt>
                 <c:pt idx="5">
-                  <c:v>60.51</c:v>
+                  <c:v>38.97</c:v>
                 </c:pt>
                 <c:pt idx="6">
-                  <c:v>61.79</c:v>
+                  <c:v>39.22</c:v>
                 </c:pt>
                 <c:pt idx="7">
-                  <c:v>61.74</c:v>
+                  <c:v>39.78</c:v>
                 </c:pt>
                 <c:pt idx="8">
-                  <c:v>62.66</c:v>
+                  <c:v>42.63</c:v>
                 </c:pt>
                 <c:pt idx="9">
-                  <c:v>63.92</c:v>
+                  <c:v>41.63</c:v>
                 </c:pt>
               </c:numCache>
             </c:numRef>
@@ -2261,7 +2261,7 @@
           <a:p>
             <a:r>
               <a:rPr lang="en-US" dirty="0"/>
-              <a:t>【約 30 秒】開場先講這句話，再進三個數字。全場骨架：標註修好 → 交付換 v5.7（但模型沒變好）→ 即時辨識變成分裝置 → 三個要當場定的決策。</a:t>
+              <a:t>【約 30 秒】開場先講這句話，再進三個數字。全場骨架：標註修好 → 交付改用 v5.7 資料集重訓（但模型沒變好）→ 即時辨識變成分裝置 → 三個要當場定的決策。</a:t>
             </a:r>
             <a:endParaRPr lang="en-US" dirty="0"/>
           </a:p>
@@ -2789,7 +2789,7 @@
           <a:p>
             <a:r>
               <a:rPr lang="en-US" dirty="0"/>
-              <a:t>被問到「其他解析度呢」「手機為什麼慢」時翻這頁。紅字是短時間過線、連續跑不過的兩個組合。</a:t>
+              <a:t>被問到「其他解析度呢」「手機為什麼慢」時翻這頁。紅字是短時間過線、連續跑不過的三個組合（平板 416 end2end 關是 09-15 補量）。mAP50 依匯出報告逐變體列出，end2end 關的精度比開著高約 0.01。</a:t>
             </a:r>
             <a:endParaRPr lang="en-US" dirty="0"/>
           </a:p>
@@ -3581,7 +3581,7 @@
           <a:p>
             <a:r>
               <a:rPr lang="en-US" dirty="0"/>
-              <a:t>【約 1 分鐘】看圖：左邊九類變高、中間八類沒動、右邊薊馬葉害跳上去。那一跳是框定義換掉，不是模型能力。換 v5.7 的理由是數字有解釋力，不是分數變高。</a:t>
+              <a:t>【約 1 分鐘】看圖：左邊九類變高、中間八類沒動、右邊薊馬葉害跳上去。那一跳是框定義換掉，不是模型能力。模型兩邊都是 v11.5，只換了資料集；換的理由是數字有解釋力，不是分數變高。</a:t>
             </a:r>
             <a:endParaRPr lang="en-US" dirty="0"/>
           </a:p>
@@ -3757,7 +3757,7 @@
           <a:p>
             <a:r>
               <a:rPr lang="en-US" dirty="0"/>
-              <a:t>【約 1 分 15 秒】指著圖：橘線（平板）一路往上爬、綠線（手機）第 3 段突然跳上去、灰線（662）一直平——除了手機的前兩段，全都在紅線上面。換成畫面感受：相機每秒 30 張，16 FPS 大約每兩張只辨識一張。「掉得越多」的原因（算力高 → 發熱大 → 先降頻）是推測，沒量功耗。</a:t>
+              <a:t>【約 1 分 15 秒】指著圖：橘線（平板 416）一路往上爬、第 9 段越過紅線；綠線（手機 416）第 3 段突然跳上去；灰線（662）一直平、而且本來就在紅線上面。平板 416 是 09-15 補量的（原本因精度表寫錯而漏量，見備答）；平板 512 更明顯，連續跑剩 16 FPS。換成畫面感受：相機每秒 30 張，16 FPS 大約每兩張只辨識一張。「掉得越多」的原因（算力高 → 發熱大 → 先降頻）是推測，沒量功耗。</a:t>
             </a:r>
             <a:endParaRPr lang="en-US" dirty="0"/>
           </a:p>
@@ -4522,7 +4522,7 @@
                 <a:ea typeface="Microsoft JhengHei" pitchFamily="34" charset="-122"/>
                 <a:cs typeface="Microsoft JhengHei" pitchFamily="34" charset="-120"/>
               </a:rPr>
-              <a:t>標註的問題找到根因並修好、交付換成 v5.7、兩台高階裝置上即時辨識成立——但都只到 320 解析度；不新拍照片的前提下，工程手段已經用盡。</a:t>
+              <a:t>標註的問題找到根因並修好、交付權重改用 v5.7 資料集重訓、兩台高階裝置上即時辨識成立——但都只到 320 解析度；不新拍照片的前提下，工程手段已經用盡。</a:t>
             </a:r>
             <a:endParaRPr lang="en-US" sz="1800" dirty="0"/>
           </a:p>
@@ -4999,7 +4999,7 @@
                 <a:ea typeface="Microsoft JhengHei" pitchFamily="34" charset="-122"/>
                 <a:cs typeface="Microsoft JhengHei" pitchFamily="34" charset="-120"/>
               </a:rPr>
-              <a:t>選定拍照模式的組合，以 v5.7 權重重新匯出並重評精度</a:t>
+              <a:t>選定拍照模式的組合，以交付權重重新匯出並重評精度</a:t>
             </a:r>
             <a:endParaRPr lang="en-US" sz="1350" dirty="0"/>
           </a:p>
@@ -5580,7 +5580,7 @@
                 <a:ea typeface="Microsoft JhengHei" pitchFamily="34" charset="-122"/>
                 <a:cs typeface="Microsoft JhengHei" pitchFamily="34" charset="-120"/>
               </a:rPr>
-              <a:t>交付模型 v5.7：規格與整體指標</a:t>
+              <a:t>交付模型 v11.5（v5.7 資料集）：規格與指標</a:t>
             </a:r>
             <a:endParaRPr lang="en-US" sz="3200" dirty="0"/>
           </a:p>
@@ -5619,7 +5619,7 @@
                 <a:ea typeface="Microsoft JhengHei" pitchFamily="34" charset="-122"/>
                 <a:cs typeface="Microsoft JhengHei" pitchFamily="34" charset="-120"/>
               </a:rPr>
-              <a:t>目前交付的權重與它在 valid、test（各 401 張）上的完整數字</a:t>
+              <a:t>v5.7 是資料集版本，訓練碼與架構都是 v11.5（run v5.7_v11_5）　·　valid、test 各 401 張</a:t>
             </a:r>
             <a:endParaRPr lang="en-US" sz="1500" dirty="0"/>
           </a:p>
@@ -7886,7 +7886,7 @@
                           <a:ea typeface="Microsoft JhengHei" pitchFamily="34" charset="-122"/>
                           <a:cs typeface="Microsoft JhengHei" pitchFamily="34" charset="-120"/>
                         </a:rPr>
-                        <a:t>0.729</a:t>
+                        <a:t>0.727</a:t>
                       </a:r>
                       <a:endParaRPr lang="en-US" sz="1200" dirty="0">
                         <a:latin typeface="Microsoft JhengHei" charset="0"/>
@@ -8083,7 +8083,7 @@
                           <a:ea typeface="Microsoft JhengHei" pitchFamily="34" charset="-122"/>
                           <a:cs typeface="Microsoft JhengHei" pitchFamily="34" charset="-120"/>
                         </a:rPr>
-                        <a:t>675 / 116 / 133</a:t>
+                        <a:t>675 / 118 / 135</a:t>
                       </a:r>
                       <a:endParaRPr lang="en-US" sz="1200" dirty="0">
                         <a:latin typeface="Microsoft JhengHei" charset="0"/>
@@ -8407,7 +8407,7 @@
                 <a:ea typeface="Microsoft JhengHei" pitchFamily="34" charset="-122"/>
                 <a:cs typeface="Microsoft JhengHei" pitchFamily="34" charset="-120"/>
               </a:rPr>
-              <a:t>九類 test mAP50 0.861 不可與 v11.5 的 0.810 相比（薊馬葉害換了框定義）；標註沒變的八類平均 0.853 → 0.851，等於沒變。手機上的 TFLite 仍是 v11.5 權重匯出。</a:t>
+              <a:t>九類 test mAP50 0.861 不可與上一版（v5.6 資料集）的 0.810 相比（薊馬葉害換了框定義）；標註沒變的八類平均 0.853 → 0.851，等於沒變。手機上的 TFLite 仍是 v11.5（v5.6 資料集）權重匯出。</a:t>
             </a:r>
             <a:endParaRPr lang="en-US" sz="1250" dirty="0"/>
           </a:p>
@@ -8517,7 +8517,7 @@
                 <a:ea typeface="Microsoft JhengHei" pitchFamily="34" charset="-122"/>
                 <a:cs typeface="Microsoft JhengHei" pitchFamily="34" charset="-120"/>
               </a:rPr>
-              <a:t>交付模型 v5.7：九類逐類 AP50</a:t>
+              <a:t>交付模型 v11.5（v5.7 資料集）：九類逐類 AP50</a:t>
             </a:r>
             <a:endParaRPr lang="en-US" sz="3200" dirty="0"/>
           </a:p>
@@ -20561,7 +20561,7 @@
                 <a:ea typeface="Microsoft JhengHei" pitchFamily="34" charset="-122"/>
                 <a:cs typeface="Microsoft JhengHei" pitchFamily="34" charset="-120"/>
               </a:rPr>
-              <a:t>同 8 個 fp32 檔案、同一套量測方法　·　延遲與 mAP50 都來自 v11.5 權重的匯出檔，交付的 v5.7 尚未重新匯出</a:t>
+              <a:t>同 8 個 fp32 檔案、同一套量測方法　·　延遲與 mAP50 都來自 v11.5（v5.6 資料集）權重的匯出檔，交付權重尚未重新匯出</a:t>
             </a:r>
             <a:endParaRPr lang="en-US" sz="1500" dirty="0"/>
           </a:p>
@@ -20599,7 +20599,7 @@
                 <a:gridCol w="1170432"/>
                 <a:gridCol w="1145743"/>
               </a:tblGrid>
-              <a:tr h="438912">
+              <a:tr h="393192">
                 <a:tc>
                   <a:txBody>
                     <a:bodyPr/>
@@ -20617,7 +20617,7 @@
                           <a:ea typeface="Microsoft JhengHei" pitchFamily="34" charset="-122"/>
                           <a:cs typeface="Microsoft JhengHei" pitchFamily="34" charset="-120"/>
                         </a:rPr>
-                        <a:t>組合（end2end 開）</a:t>
+                        <a:t>組合（未註明者 end2end 開）</a:t>
                       </a:r>
                       <a:endParaRPr lang="en-US" sz="1200" dirty="0">
                         <a:latin typeface="Microsoft JhengHei" charset="0"/>
@@ -21145,7 +21145,7 @@
                   </a:tcPr>
                 </a:tc>
               </a:tr>
-              <a:tr h="438912">
+              <a:tr h="393192">
                 <a:tc>
                   <a:txBody>
                     <a:bodyPr/>
@@ -21618,7 +21618,7 @@
                           <a:ea typeface="Microsoft JhengHei" pitchFamily="34" charset="-122"/>
                           <a:cs typeface="Microsoft JhengHei" pitchFamily="34" charset="-120"/>
                         </a:rPr>
-                        <a:t>0.785</a:t>
+                        <a:t>0.780</a:t>
                       </a:r>
                       <a:endParaRPr lang="en-US" sz="1250" dirty="0">
                         <a:latin typeface="Microsoft JhengHei" charset="0"/>
@@ -21667,7 +21667,7 @@
                   </a:tcPr>
                 </a:tc>
               </a:tr>
-              <a:tr h="438912">
+              <a:tr h="393192">
                 <a:tc>
                   <a:txBody>
                     <a:bodyPr/>
@@ -22189,7 +22189,529 @@
                   </a:tcPr>
                 </a:tc>
               </a:tr>
-              <a:tr h="438912">
+              <a:tr h="393192">
+                <a:tc>
+                  <a:txBody>
+                    <a:bodyPr/>
+                    <a:lstStyle/>
+                    <a:p>
+                      <a:pPr algn="ctr" indent="0" marL="0">
+                        <a:buNone/>
+                      </a:pPr>
+                      <a:r>
+                        <a:rPr lang="en-US" sz="1250" b="1" dirty="0">
+                          <a:solidFill>
+                            <a:srgbClr val="1A2620"/>
+                          </a:solidFill>
+                          <a:latin typeface="Microsoft JhengHei" pitchFamily="34" charset="0"/>
+                          <a:ea typeface="Microsoft JhengHei" pitchFamily="34" charset="-122"/>
+                          <a:cs typeface="Microsoft JhengHei" pitchFamily="34" charset="-120"/>
+                        </a:rPr>
+                        <a:t>fp32@416 · end2end 關</a:t>
+                      </a:r>
+                      <a:endParaRPr lang="en-US" sz="1250" dirty="0">
+                        <a:latin typeface="Microsoft JhengHei" charset="0"/>
+                        <a:ea typeface="Microsoft JhengHei" charset="0"/>
+                        <a:cs typeface="Microsoft JhengHei" charset="0"/>
+                      </a:endParaRPr>
+                    </a:p>
+                  </a:txBody>
+                  <a:tcPr marL="91440" marR="91440" marT="45720" marB="45720" anchor="ctr">
+                    <a:lnL w="6350" cap="flat" cmpd="sng" algn="ctr">
+                      <a:solidFill>
+                        <a:srgbClr val="C9DCD0"/>
+                      </a:solidFill>
+                      <a:prstDash val="solid"/>
+                      <a:round/>
+                      <a:headEnd type="none" w="med" len="med"/>
+                      <a:tailEnd type="none" w="med" len="med"/>
+                    </a:lnL>
+                    <a:lnR w="6350" cap="flat" cmpd="sng" algn="ctr">
+                      <a:solidFill>
+                        <a:srgbClr val="C9DCD0"/>
+                      </a:solidFill>
+                      <a:prstDash val="solid"/>
+                      <a:round/>
+                      <a:headEnd type="none" w="med" len="med"/>
+                      <a:tailEnd type="none" w="med" len="med"/>
+                    </a:lnR>
+                    <a:lnT w="6350" cap="flat" cmpd="sng" algn="ctr">
+                      <a:solidFill>
+                        <a:srgbClr val="C9DCD0"/>
+                      </a:solidFill>
+                      <a:prstDash val="solid"/>
+                      <a:round/>
+                      <a:headEnd type="none" w="med" len="med"/>
+                      <a:tailEnd type="none" w="med" len="med"/>
+                    </a:lnT>
+                    <a:lnB w="6350" cap="flat" cmpd="sng" algn="ctr">
+                      <a:solidFill>
+                        <a:srgbClr val="C9DCD0"/>
+                      </a:solidFill>
+                      <a:prstDash val="solid"/>
+                      <a:round/>
+                      <a:headEnd type="none" w="med" len="med"/>
+                      <a:tailEnd type="none" w="med" len="med"/>
+                    </a:lnB>
+                  </a:tcPr>
+                </a:tc>
+                <a:tc>
+                  <a:txBody>
+                    <a:bodyPr/>
+                    <a:lstStyle/>
+                    <a:p>
+                      <a:pPr algn="ctr" indent="0" marL="0">
+                        <a:buNone/>
+                      </a:pPr>
+                      <a:r>
+                        <a:rPr lang="en-US" sz="1250" dirty="0">
+                          <a:solidFill>
+                            <a:srgbClr val="1A2620"/>
+                          </a:solidFill>
+                          <a:latin typeface="Microsoft JhengHei" pitchFamily="34" charset="0"/>
+                          <a:ea typeface="Microsoft JhengHei" pitchFamily="34" charset="-122"/>
+                          <a:cs typeface="Microsoft JhengHei" pitchFamily="34" charset="-120"/>
+                        </a:rPr>
+                        <a:t>8.8</a:t>
+                      </a:r>
+                      <a:endParaRPr lang="en-US" sz="1250" dirty="0">
+                        <a:latin typeface="Microsoft JhengHei" charset="0"/>
+                        <a:ea typeface="Microsoft JhengHei" charset="0"/>
+                        <a:cs typeface="Microsoft JhengHei" charset="0"/>
+                      </a:endParaRPr>
+                    </a:p>
+                  </a:txBody>
+                  <a:tcPr marL="91440" marR="91440" marT="45720" marB="45720" anchor="ctr">
+                    <a:lnL w="6350" cap="flat" cmpd="sng" algn="ctr">
+                      <a:solidFill>
+                        <a:srgbClr val="C9DCD0"/>
+                      </a:solidFill>
+                      <a:prstDash val="solid"/>
+                      <a:round/>
+                      <a:headEnd type="none" w="med" len="med"/>
+                      <a:tailEnd type="none" w="med" len="med"/>
+                    </a:lnL>
+                    <a:lnR w="6350" cap="flat" cmpd="sng" algn="ctr">
+                      <a:solidFill>
+                        <a:srgbClr val="C9DCD0"/>
+                      </a:solidFill>
+                      <a:prstDash val="solid"/>
+                      <a:round/>
+                      <a:headEnd type="none" w="med" len="med"/>
+                      <a:tailEnd type="none" w="med" len="med"/>
+                    </a:lnR>
+                    <a:lnT w="6350" cap="flat" cmpd="sng" algn="ctr">
+                      <a:solidFill>
+                        <a:srgbClr val="C9DCD0"/>
+                      </a:solidFill>
+                      <a:prstDash val="solid"/>
+                      <a:round/>
+                      <a:headEnd type="none" w="med" len="med"/>
+                      <a:tailEnd type="none" w="med" len="med"/>
+                    </a:lnT>
+                    <a:lnB w="6350" cap="flat" cmpd="sng" algn="ctr">
+                      <a:solidFill>
+                        <a:srgbClr val="C9DCD0"/>
+                      </a:solidFill>
+                      <a:prstDash val="solid"/>
+                      <a:round/>
+                      <a:headEnd type="none" w="med" len="med"/>
+                      <a:tailEnd type="none" w="med" len="med"/>
+                    </a:lnB>
+                  </a:tcPr>
+                </a:tc>
+                <a:tc>
+                  <a:txBody>
+                    <a:bodyPr/>
+                    <a:lstStyle/>
+                    <a:p>
+                      <a:pPr algn="ctr" indent="0" marL="0">
+                        <a:buNone/>
+                      </a:pPr>
+                      <a:r>
+                        <a:rPr lang="en-US" sz="1250" i="1" dirty="0">
+                          <a:solidFill>
+                            <a:srgbClr val="5E6F66"/>
+                          </a:solidFill>
+                          <a:latin typeface="Microsoft JhengHei" pitchFamily="34" charset="0"/>
+                          <a:ea typeface="Microsoft JhengHei" pitchFamily="34" charset="-122"/>
+                          <a:cs typeface="Microsoft JhengHei" pitchFamily="34" charset="-120"/>
+                        </a:rPr>
+                        <a:t>沒量</a:t>
+                      </a:r>
+                      <a:endParaRPr lang="en-US" sz="1250" dirty="0">
+                        <a:latin typeface="Microsoft JhengHei" charset="0"/>
+                        <a:ea typeface="Microsoft JhengHei" charset="0"/>
+                        <a:cs typeface="Microsoft JhengHei" charset="0"/>
+                      </a:endParaRPr>
+                    </a:p>
+                  </a:txBody>
+                  <a:tcPr marL="91440" marR="91440" marT="45720" marB="45720" anchor="ctr">
+                    <a:lnL w="6350" cap="flat" cmpd="sng" algn="ctr">
+                      <a:solidFill>
+                        <a:srgbClr val="C9DCD0"/>
+                      </a:solidFill>
+                      <a:prstDash val="solid"/>
+                      <a:round/>
+                      <a:headEnd type="none" w="med" len="med"/>
+                      <a:tailEnd type="none" w="med" len="med"/>
+                    </a:lnL>
+                    <a:lnR w="6350" cap="flat" cmpd="sng" algn="ctr">
+                      <a:solidFill>
+                        <a:srgbClr val="C9DCD0"/>
+                      </a:solidFill>
+                      <a:prstDash val="solid"/>
+                      <a:round/>
+                      <a:headEnd type="none" w="med" len="med"/>
+                      <a:tailEnd type="none" w="med" len="med"/>
+                    </a:lnR>
+                    <a:lnT w="6350" cap="flat" cmpd="sng" algn="ctr">
+                      <a:solidFill>
+                        <a:srgbClr val="C9DCD0"/>
+                      </a:solidFill>
+                      <a:prstDash val="solid"/>
+                      <a:round/>
+                      <a:headEnd type="none" w="med" len="med"/>
+                      <a:tailEnd type="none" w="med" len="med"/>
+                    </a:lnT>
+                    <a:lnB w="6350" cap="flat" cmpd="sng" algn="ctr">
+                      <a:solidFill>
+                        <a:srgbClr val="C9DCD0"/>
+                      </a:solidFill>
+                      <a:prstDash val="solid"/>
+                      <a:round/>
+                      <a:headEnd type="none" w="med" len="med"/>
+                      <a:tailEnd type="none" w="med" len="med"/>
+                    </a:lnB>
+                  </a:tcPr>
+                </a:tc>
+                <a:tc>
+                  <a:txBody>
+                    <a:bodyPr/>
+                    <a:lstStyle/>
+                    <a:p>
+                      <a:pPr algn="ctr" indent="0" marL="0">
+                        <a:buNone/>
+                      </a:pPr>
+                      <a:r>
+                        <a:rPr lang="en-US" sz="1250" dirty="0">
+                          <a:solidFill>
+                            <a:srgbClr val="1A2620"/>
+                          </a:solidFill>
+                          <a:latin typeface="Microsoft JhengHei" pitchFamily="34" charset="0"/>
+                          <a:ea typeface="Microsoft JhengHei" pitchFamily="34" charset="-122"/>
+                          <a:cs typeface="Microsoft JhengHei" pitchFamily="34" charset="-120"/>
+                        </a:rPr>
+                        <a:t>37.1</a:t>
+                      </a:r>
+                      <a:endParaRPr lang="en-US" sz="1250" dirty="0">
+                        <a:latin typeface="Microsoft JhengHei" charset="0"/>
+                        <a:ea typeface="Microsoft JhengHei" charset="0"/>
+                        <a:cs typeface="Microsoft JhengHei" charset="0"/>
+                      </a:endParaRPr>
+                    </a:p>
+                  </a:txBody>
+                  <a:tcPr marL="91440" marR="91440" marT="45720" marB="45720" anchor="ctr">
+                    <a:lnL w="6350" cap="flat" cmpd="sng" algn="ctr">
+                      <a:solidFill>
+                        <a:srgbClr val="C9DCD0"/>
+                      </a:solidFill>
+                      <a:prstDash val="solid"/>
+                      <a:round/>
+                      <a:headEnd type="none" w="med" len="med"/>
+                      <a:tailEnd type="none" w="med" len="med"/>
+                    </a:lnL>
+                    <a:lnR w="6350" cap="flat" cmpd="sng" algn="ctr">
+                      <a:solidFill>
+                        <a:srgbClr val="C9DCD0"/>
+                      </a:solidFill>
+                      <a:prstDash val="solid"/>
+                      <a:round/>
+                      <a:headEnd type="none" w="med" len="med"/>
+                      <a:tailEnd type="none" w="med" len="med"/>
+                    </a:lnR>
+                    <a:lnT w="6350" cap="flat" cmpd="sng" algn="ctr">
+                      <a:solidFill>
+                        <a:srgbClr val="C9DCD0"/>
+                      </a:solidFill>
+                      <a:prstDash val="solid"/>
+                      <a:round/>
+                      <a:headEnd type="none" w="med" len="med"/>
+                      <a:tailEnd type="none" w="med" len="med"/>
+                    </a:lnT>
+                    <a:lnB w="6350" cap="flat" cmpd="sng" algn="ctr">
+                      <a:solidFill>
+                        <a:srgbClr val="C9DCD0"/>
+                      </a:solidFill>
+                      <a:prstDash val="solid"/>
+                      <a:round/>
+                      <a:headEnd type="none" w="med" len="med"/>
+                      <a:tailEnd type="none" w="med" len="med"/>
+                    </a:lnB>
+                  </a:tcPr>
+                </a:tc>
+                <a:tc>
+                  <a:txBody>
+                    <a:bodyPr/>
+                    <a:lstStyle/>
+                    <a:p>
+                      <a:pPr algn="ctr" indent="0" marL="0">
+                        <a:buNone/>
+                      </a:pPr>
+                      <a:r>
+                        <a:rPr lang="en-US" sz="1250" b="1" dirty="0">
+                          <a:solidFill>
+                            <a:srgbClr val="B3453A"/>
+                          </a:solidFill>
+                          <a:latin typeface="Microsoft JhengHei" pitchFamily="34" charset="0"/>
+                          <a:ea typeface="Microsoft JhengHei" pitchFamily="34" charset="-122"/>
+                          <a:cs typeface="Microsoft JhengHei" pitchFamily="34" charset="-120"/>
+                        </a:rPr>
+                        <a:t>23.5</a:t>
+                      </a:r>
+                      <a:endParaRPr lang="en-US" sz="1250" dirty="0">
+                        <a:latin typeface="Microsoft JhengHei" charset="0"/>
+                        <a:ea typeface="Microsoft JhengHei" charset="0"/>
+                        <a:cs typeface="Microsoft JhengHei" charset="0"/>
+                      </a:endParaRPr>
+                    </a:p>
+                  </a:txBody>
+                  <a:tcPr marL="91440" marR="91440" marT="45720" marB="45720" anchor="ctr">
+                    <a:lnL w="6350" cap="flat" cmpd="sng" algn="ctr">
+                      <a:solidFill>
+                        <a:srgbClr val="C9DCD0"/>
+                      </a:solidFill>
+                      <a:prstDash val="solid"/>
+                      <a:round/>
+                      <a:headEnd type="none" w="med" len="med"/>
+                      <a:tailEnd type="none" w="med" len="med"/>
+                    </a:lnL>
+                    <a:lnR w="6350" cap="flat" cmpd="sng" algn="ctr">
+                      <a:solidFill>
+                        <a:srgbClr val="C9DCD0"/>
+                      </a:solidFill>
+                      <a:prstDash val="solid"/>
+                      <a:round/>
+                      <a:headEnd type="none" w="med" len="med"/>
+                      <a:tailEnd type="none" w="med" len="med"/>
+                    </a:lnR>
+                    <a:lnT w="6350" cap="flat" cmpd="sng" algn="ctr">
+                      <a:solidFill>
+                        <a:srgbClr val="C9DCD0"/>
+                      </a:solidFill>
+                      <a:prstDash val="solid"/>
+                      <a:round/>
+                      <a:headEnd type="none" w="med" len="med"/>
+                      <a:tailEnd type="none" w="med" len="med"/>
+                    </a:lnT>
+                    <a:lnB w="6350" cap="flat" cmpd="sng" algn="ctr">
+                      <a:solidFill>
+                        <a:srgbClr val="C9DCD0"/>
+                      </a:solidFill>
+                      <a:prstDash val="solid"/>
+                      <a:round/>
+                      <a:headEnd type="none" w="med" len="med"/>
+                      <a:tailEnd type="none" w="med" len="med"/>
+                    </a:lnB>
+                  </a:tcPr>
+                </a:tc>
+                <a:tc>
+                  <a:txBody>
+                    <a:bodyPr/>
+                    <a:lstStyle/>
+                    <a:p>
+                      <a:pPr algn="ctr" indent="0" marL="0">
+                        <a:buNone/>
+                      </a:pPr>
+                      <a:r>
+                        <a:rPr lang="en-US" sz="1250" dirty="0">
+                          <a:solidFill>
+                            <a:srgbClr val="1A2620"/>
+                          </a:solidFill>
+                          <a:latin typeface="Microsoft JhengHei" pitchFamily="34" charset="0"/>
+                          <a:ea typeface="Microsoft JhengHei" pitchFamily="34" charset="-122"/>
+                          <a:cs typeface="Microsoft JhengHei" pitchFamily="34" charset="-120"/>
+                        </a:rPr>
+                        <a:t>20.1</a:t>
+                      </a:r>
+                      <a:endParaRPr lang="en-US" sz="1250" dirty="0">
+                        <a:latin typeface="Microsoft JhengHei" charset="0"/>
+                        <a:ea typeface="Microsoft JhengHei" charset="0"/>
+                        <a:cs typeface="Microsoft JhengHei" charset="0"/>
+                      </a:endParaRPr>
+                    </a:p>
+                  </a:txBody>
+                  <a:tcPr marL="91440" marR="91440" marT="45720" marB="45720" anchor="ctr">
+                    <a:lnL w="6350" cap="flat" cmpd="sng" algn="ctr">
+                      <a:solidFill>
+                        <a:srgbClr val="C9DCD0"/>
+                      </a:solidFill>
+                      <a:prstDash val="solid"/>
+                      <a:round/>
+                      <a:headEnd type="none" w="med" len="med"/>
+                      <a:tailEnd type="none" w="med" len="med"/>
+                    </a:lnL>
+                    <a:lnR w="6350" cap="flat" cmpd="sng" algn="ctr">
+                      <a:solidFill>
+                        <a:srgbClr val="C9DCD0"/>
+                      </a:solidFill>
+                      <a:prstDash val="solid"/>
+                      <a:round/>
+                      <a:headEnd type="none" w="med" len="med"/>
+                      <a:tailEnd type="none" w="med" len="med"/>
+                    </a:lnR>
+                    <a:lnT w="6350" cap="flat" cmpd="sng" algn="ctr">
+                      <a:solidFill>
+                        <a:srgbClr val="C9DCD0"/>
+                      </a:solidFill>
+                      <a:prstDash val="solid"/>
+                      <a:round/>
+                      <a:headEnd type="none" w="med" len="med"/>
+                      <a:tailEnd type="none" w="med" len="med"/>
+                    </a:lnT>
+                    <a:lnB w="6350" cap="flat" cmpd="sng" algn="ctr">
+                      <a:solidFill>
+                        <a:srgbClr val="C9DCD0"/>
+                      </a:solidFill>
+                      <a:prstDash val="solid"/>
+                      <a:round/>
+                      <a:headEnd type="none" w="med" len="med"/>
+                      <a:tailEnd type="none" w="med" len="med"/>
+                    </a:lnB>
+                  </a:tcPr>
+                </a:tc>
+                <a:tc>
+                  <a:txBody>
+                    <a:bodyPr/>
+                    <a:lstStyle/>
+                    <a:p>
+                      <a:pPr algn="ctr" indent="0" marL="0">
+                        <a:buNone/>
+                      </a:pPr>
+                      <a:r>
+                        <a:rPr lang="en-US" sz="1250" i="1" dirty="0">
+                          <a:solidFill>
+                            <a:srgbClr val="5E6F66"/>
+                          </a:solidFill>
+                          <a:latin typeface="Microsoft JhengHei" pitchFamily="34" charset="0"/>
+                          <a:ea typeface="Microsoft JhengHei" pitchFamily="34" charset="-122"/>
+                          <a:cs typeface="Microsoft JhengHei" pitchFamily="34" charset="-120"/>
+                        </a:rPr>
+                        <a:t>沒量</a:t>
+                      </a:r>
+                      <a:endParaRPr lang="en-US" sz="1250" dirty="0">
+                        <a:latin typeface="Microsoft JhengHei" charset="0"/>
+                        <a:ea typeface="Microsoft JhengHei" charset="0"/>
+                        <a:cs typeface="Microsoft JhengHei" charset="0"/>
+                      </a:endParaRPr>
+                    </a:p>
+                  </a:txBody>
+                  <a:tcPr marL="91440" marR="91440" marT="45720" marB="45720" anchor="ctr">
+                    <a:lnL w="6350" cap="flat" cmpd="sng" algn="ctr">
+                      <a:solidFill>
+                        <a:srgbClr val="C9DCD0"/>
+                      </a:solidFill>
+                      <a:prstDash val="solid"/>
+                      <a:round/>
+                      <a:headEnd type="none" w="med" len="med"/>
+                      <a:tailEnd type="none" w="med" len="med"/>
+                    </a:lnL>
+                    <a:lnR w="6350" cap="flat" cmpd="sng" algn="ctr">
+                      <a:solidFill>
+                        <a:srgbClr val="C9DCD0"/>
+                      </a:solidFill>
+                      <a:prstDash val="solid"/>
+                      <a:round/>
+                      <a:headEnd type="none" w="med" len="med"/>
+                      <a:tailEnd type="none" w="med" len="med"/>
+                    </a:lnR>
+                    <a:lnT w="6350" cap="flat" cmpd="sng" algn="ctr">
+                      <a:solidFill>
+                        <a:srgbClr val="C9DCD0"/>
+                      </a:solidFill>
+                      <a:prstDash val="solid"/>
+                      <a:round/>
+                      <a:headEnd type="none" w="med" len="med"/>
+                      <a:tailEnd type="none" w="med" len="med"/>
+                    </a:lnT>
+                    <a:lnB w="6350" cap="flat" cmpd="sng" algn="ctr">
+                      <a:solidFill>
+                        <a:srgbClr val="C9DCD0"/>
+                      </a:solidFill>
+                      <a:prstDash val="solid"/>
+                      <a:round/>
+                      <a:headEnd type="none" w="med" len="med"/>
+                      <a:tailEnd type="none" w="med" len="med"/>
+                    </a:lnB>
+                  </a:tcPr>
+                </a:tc>
+                <a:tc>
+                  <a:txBody>
+                    <a:bodyPr/>
+                    <a:lstStyle/>
+                    <a:p>
+                      <a:pPr algn="ctr" indent="0" marL="0">
+                        <a:buNone/>
+                      </a:pPr>
+                      <a:r>
+                        <a:rPr lang="en-US" sz="1250" dirty="0">
+                          <a:solidFill>
+                            <a:srgbClr val="1A2620"/>
+                          </a:solidFill>
+                          <a:latin typeface="Microsoft JhengHei" pitchFamily="34" charset="0"/>
+                          <a:ea typeface="Microsoft JhengHei" pitchFamily="34" charset="-122"/>
+                          <a:cs typeface="Microsoft JhengHei" pitchFamily="34" charset="-120"/>
+                        </a:rPr>
+                        <a:t>0.815</a:t>
+                      </a:r>
+                      <a:endParaRPr lang="en-US" sz="1250" dirty="0">
+                        <a:latin typeface="Microsoft JhengHei" charset="0"/>
+                        <a:ea typeface="Microsoft JhengHei" charset="0"/>
+                        <a:cs typeface="Microsoft JhengHei" charset="0"/>
+                      </a:endParaRPr>
+                    </a:p>
+                  </a:txBody>
+                  <a:tcPr marL="91440" marR="91440" marT="45720" marB="45720" anchor="ctr">
+                    <a:lnL w="6350" cap="flat" cmpd="sng" algn="ctr">
+                      <a:solidFill>
+                        <a:srgbClr val="C9DCD0"/>
+                      </a:solidFill>
+                      <a:prstDash val="solid"/>
+                      <a:round/>
+                      <a:headEnd type="none" w="med" len="med"/>
+                      <a:tailEnd type="none" w="med" len="med"/>
+                    </a:lnL>
+                    <a:lnR w="6350" cap="flat" cmpd="sng" algn="ctr">
+                      <a:solidFill>
+                        <a:srgbClr val="C9DCD0"/>
+                      </a:solidFill>
+                      <a:prstDash val="solid"/>
+                      <a:round/>
+                      <a:headEnd type="none" w="med" len="med"/>
+                      <a:tailEnd type="none" w="med" len="med"/>
+                    </a:lnR>
+                    <a:lnT w="6350" cap="flat" cmpd="sng" algn="ctr">
+                      <a:solidFill>
+                        <a:srgbClr val="C9DCD0"/>
+                      </a:solidFill>
+                      <a:prstDash val="solid"/>
+                      <a:round/>
+                      <a:headEnd type="none" w="med" len="med"/>
+                      <a:tailEnd type="none" w="med" len="med"/>
+                    </a:lnT>
+                    <a:lnB w="6350" cap="flat" cmpd="sng" algn="ctr">
+                      <a:solidFill>
+                        <a:srgbClr val="C9DCD0"/>
+                      </a:solidFill>
+                      <a:prstDash val="solid"/>
+                      <a:round/>
+                      <a:headEnd type="none" w="med" len="med"/>
+                      <a:tailEnd type="none" w="med" len="med"/>
+                    </a:lnB>
+                  </a:tcPr>
+                </a:tc>
+              </a:tr>
+              <a:tr h="393192">
                 <a:tc>
                   <a:txBody>
                     <a:bodyPr/>
@@ -22711,7 +23233,7 @@
                   </a:tcPr>
                 </a:tc>
               </a:tr>
-              <a:tr h="438912">
+              <a:tr h="393192">
                 <a:tc>
                   <a:txBody>
                     <a:bodyPr/>
@@ -23233,7 +23755,7 @@
                   </a:tcPr>
                 </a:tc>
               </a:tr>
-              <a:tr h="438912">
+              <a:tr h="393192">
                 <a:tc>
                   <a:txBody>
                     <a:bodyPr/>
@@ -23706,7 +24228,7 @@
                           <a:ea typeface="Microsoft JhengHei" pitchFamily="34" charset="-122"/>
                           <a:cs typeface="Microsoft JhengHei" pitchFamily="34" charset="-120"/>
                         </a:rPr>
-                        <a:t>0.816</a:t>
+                        <a:t>0.826</a:t>
                       </a:r>
                       <a:endParaRPr lang="en-US" sz="1250" dirty="0">
                         <a:latin typeface="Microsoft JhengHei" charset="0"/>
@@ -23755,7 +24277,7 @@
                   </a:tcPr>
                 </a:tc>
               </a:tr>
-              <a:tr h="438912">
+              <a:tr h="393192">
                 <a:tc>
                   <a:txBody>
                     <a:bodyPr/>
@@ -24933,7 +25455,7 @@
                 <a:ea typeface="Microsoft JhengHei" pitchFamily="34" charset="-122"/>
                 <a:cs typeface="Microsoft JhengHei" pitchFamily="34" charset="-120"/>
               </a:rPr>
-              <a:t>每一條都可以從 git 紀錄或登記文件查到時間（與報告庫週報表 2-1 一致）</a:t>
+              <a:t>每一條都可以從 git 紀錄或登記文件查到時間</a:t>
             </a:r>
             <a:endParaRPr lang="en-US" sz="1500" dirty="0"/>
           </a:p>
@@ -24948,11 +25470,11 @@
         <p:spPr>
           <a:xfrm>
             <a:off x="640080" y="1572768"/>
-            <a:ext cx="10911535" cy="475488"/>
+            <a:ext cx="10911535" cy="429768"/>
           </a:xfrm>
           <a:prstGeom prst="roundRect">
             <a:avLst>
-              <a:gd name="adj" fmla="val 19231"/>
+              <a:gd name="adj" fmla="val 21277"/>
             </a:avLst>
           </a:prstGeom>
           <a:solidFill>
@@ -24974,8 +25496,8 @@
         </p:nvSpPr>
         <p:spPr>
           <a:xfrm>
-            <a:off x="822960" y="1636776"/>
-            <a:ext cx="347472" cy="347472"/>
+            <a:off x="822960" y="1618488"/>
+            <a:ext cx="338328" cy="338328"/>
           </a:xfrm>
           <a:prstGeom prst="ellipse">
             <a:avLst/>
@@ -24994,8 +25516,8 @@
         </p:nvSpPr>
         <p:spPr>
           <a:xfrm>
-            <a:off x="822960" y="1636776"/>
-            <a:ext cx="347472" cy="347472"/>
+            <a:off x="822960" y="1618488"/>
+            <a:ext cx="338328" cy="338328"/>
           </a:xfrm>
           <a:prstGeom prst="rect">
             <a:avLst/>
@@ -25034,7 +25556,7 @@
         <p:spPr>
           <a:xfrm>
             <a:off x="1417320" y="1572768"/>
-            <a:ext cx="1645920" cy="475488"/>
+            <a:ext cx="1645920" cy="429768"/>
           </a:xfrm>
           <a:prstGeom prst="rect">
             <a:avLst/>
@@ -25073,7 +25595,7 @@
         <p:spPr>
           <a:xfrm>
             <a:off x="3108960" y="1572768"/>
-            <a:ext cx="4480560" cy="475488"/>
+            <a:ext cx="4480560" cy="429768"/>
           </a:xfrm>
           <a:prstGeom prst="rect">
             <a:avLst/>
@@ -25089,7 +25611,7 @@
               <a:buNone/>
             </a:pPr>
             <a:r>
-              <a:rPr lang="en-US" sz="1350" dirty="0">
+              <a:rPr lang="en-US" sz="1300" dirty="0">
                 <a:solidFill>
                   <a:srgbClr val="1A2620"/>
                 </a:solidFill>
@@ -25099,7 +25621,7 @@
               </a:rPr>
               <a:t>標註一致性門檻：兩人中位 IoU ≥ 0.85</a:t>
             </a:r>
-            <a:endParaRPr lang="en-US" sz="1350" dirty="0"/>
+            <a:endParaRPr lang="en-US" sz="1300" dirty="0"/>
           </a:p>
         </p:txBody>
       </p:sp>
@@ -25112,7 +25634,7 @@
         <p:spPr>
           <a:xfrm>
             <a:off x="7635240" y="1572768"/>
-            <a:ext cx="1645920" cy="475488"/>
+            <a:ext cx="1645920" cy="429768"/>
           </a:xfrm>
           <a:prstGeom prst="rect">
             <a:avLst/>
@@ -25151,7 +25673,7 @@
         <p:spPr>
           <a:xfrm>
             <a:off x="9326880" y="1572768"/>
-            <a:ext cx="2041855" cy="475488"/>
+            <a:ext cx="2041855" cy="429768"/>
           </a:xfrm>
           <a:prstGeom prst="rect">
             <a:avLst/>
@@ -25189,12 +25711,12 @@
         </p:nvSpPr>
         <p:spPr>
           <a:xfrm>
-            <a:off x="640080" y="2121408"/>
-            <a:ext cx="10911535" cy="475488"/>
+            <a:off x="640080" y="2066544"/>
+            <a:ext cx="10911535" cy="429768"/>
           </a:xfrm>
           <a:prstGeom prst="roundRect">
             <a:avLst>
-              <a:gd name="adj" fmla="val 19231"/>
+              <a:gd name="adj" fmla="val 21277"/>
             </a:avLst>
           </a:prstGeom>
           <a:solidFill>
@@ -25216,8 +25738,8 @@
         </p:nvSpPr>
         <p:spPr>
           <a:xfrm>
-            <a:off x="822960" y="2185416"/>
-            <a:ext cx="347472" cy="347472"/>
+            <a:off x="822960" y="2112264"/>
+            <a:ext cx="338328" cy="338328"/>
           </a:xfrm>
           <a:prstGeom prst="ellipse">
             <a:avLst/>
@@ -25236,8 +25758,8 @@
         </p:nvSpPr>
         <p:spPr>
           <a:xfrm>
-            <a:off x="822960" y="2185416"/>
-            <a:ext cx="347472" cy="347472"/>
+            <a:off x="822960" y="2112264"/>
+            <a:ext cx="338328" cy="338328"/>
           </a:xfrm>
           <a:prstGeom prst="rect">
             <a:avLst/>
@@ -25275,8 +25797,8 @@
         </p:nvSpPr>
         <p:spPr>
           <a:xfrm>
-            <a:off x="1417320" y="2121408"/>
-            <a:ext cx="1645920" cy="475488"/>
+            <a:off x="1417320" y="2066544"/>
+            <a:ext cx="1645920" cy="429768"/>
           </a:xfrm>
           <a:prstGeom prst="rect">
             <a:avLst/>
@@ -25314,8 +25836,8 @@
         </p:nvSpPr>
         <p:spPr>
           <a:xfrm>
-            <a:off x="3108960" y="2121408"/>
-            <a:ext cx="4480560" cy="475488"/>
+            <a:off x="3108960" y="2066544"/>
+            <a:ext cx="4480560" cy="429768"/>
           </a:xfrm>
           <a:prstGeom prst="rect">
             <a:avLst/>
@@ -25331,7 +25853,7 @@
               <a:buNone/>
             </a:pPr>
             <a:r>
-              <a:rPr lang="en-US" sz="1350" dirty="0">
+              <a:rPr lang="en-US" sz="1300" dirty="0">
                 <a:solidFill>
                   <a:srgbClr val="1A2620"/>
                 </a:solidFill>
@@ -25341,7 +25863,7 @@
               </a:rPr>
               <a:t>v12.2 即時辨識採用門檻登記</a:t>
             </a:r>
-            <a:endParaRPr lang="en-US" sz="1350" dirty="0"/>
+            <a:endParaRPr lang="en-US" sz="1300" dirty="0"/>
           </a:p>
         </p:txBody>
       </p:sp>
@@ -25353,8 +25875,8 @@
         </p:nvSpPr>
         <p:spPr>
           <a:xfrm>
-            <a:off x="7635240" y="2121408"/>
-            <a:ext cx="1645920" cy="475488"/>
+            <a:off x="7635240" y="2066544"/>
+            <a:ext cx="1645920" cy="429768"/>
           </a:xfrm>
           <a:prstGeom prst="rect">
             <a:avLst/>
@@ -25392,8 +25914,8 @@
         </p:nvSpPr>
         <p:spPr>
           <a:xfrm>
-            <a:off x="9326880" y="2121408"/>
-            <a:ext cx="2041855" cy="475488"/>
+            <a:off x="9326880" y="2066544"/>
+            <a:ext cx="2041855" cy="429768"/>
           </a:xfrm>
           <a:prstGeom prst="rect">
             <a:avLst/>
@@ -25431,12 +25953,12 @@
         </p:nvSpPr>
         <p:spPr>
           <a:xfrm>
-            <a:off x="640080" y="2670048"/>
-            <a:ext cx="10911535" cy="475488"/>
+            <a:off x="640080" y="2560320"/>
+            <a:ext cx="10911535" cy="429768"/>
           </a:xfrm>
           <a:prstGeom prst="roundRect">
             <a:avLst>
-              <a:gd name="adj" fmla="val 19231"/>
+              <a:gd name="adj" fmla="val 21277"/>
             </a:avLst>
           </a:prstGeom>
           <a:solidFill>
@@ -25458,8 +25980,8 @@
         </p:nvSpPr>
         <p:spPr>
           <a:xfrm>
-            <a:off x="822960" y="2734056"/>
-            <a:ext cx="347472" cy="347472"/>
+            <a:off x="822960" y="2606040"/>
+            <a:ext cx="338328" cy="338328"/>
           </a:xfrm>
           <a:prstGeom prst="ellipse">
             <a:avLst/>
@@ -25478,8 +26000,8 @@
         </p:nvSpPr>
         <p:spPr>
           <a:xfrm>
-            <a:off x="822960" y="2734056"/>
-            <a:ext cx="347472" cy="347472"/>
+            <a:off x="822960" y="2606040"/>
+            <a:ext cx="338328" cy="338328"/>
           </a:xfrm>
           <a:prstGeom prst="rect">
             <a:avLst/>
@@ -25517,8 +26039,8 @@
         </p:nvSpPr>
         <p:spPr>
           <a:xfrm>
-            <a:off x="1417320" y="2670048"/>
-            <a:ext cx="1645920" cy="475488"/>
+            <a:off x="1417320" y="2560320"/>
+            <a:ext cx="1645920" cy="429768"/>
           </a:xfrm>
           <a:prstGeom prst="rect">
             <a:avLst/>
@@ -25556,8 +26078,8 @@
         </p:nvSpPr>
         <p:spPr>
           <a:xfrm>
-            <a:off x="3108960" y="2670048"/>
-            <a:ext cx="4480560" cy="475488"/>
+            <a:off x="3108960" y="2560320"/>
+            <a:ext cx="4480560" cy="429768"/>
           </a:xfrm>
           <a:prstGeom prst="rect">
             <a:avLst/>
@@ -25573,7 +26095,7 @@
               <a:buNone/>
             </a:pPr>
             <a:r>
-              <a:rPr lang="en-US" sz="1350" dirty="0">
+              <a:rPr lang="en-US" sz="1300" dirty="0">
                 <a:solidFill>
                   <a:srgbClr val="1A2620"/>
                 </a:solidFill>
@@ -25583,7 +26105,7 @@
               </a:rPr>
               <a:t>薊馬葉害「一張葉子一個框」重測規則</a:t>
             </a:r>
-            <a:endParaRPr lang="en-US" sz="1350" dirty="0"/>
+            <a:endParaRPr lang="en-US" sz="1300" dirty="0"/>
           </a:p>
         </p:txBody>
       </p:sp>
@@ -25595,8 +26117,8 @@
         </p:nvSpPr>
         <p:spPr>
           <a:xfrm>
-            <a:off x="7635240" y="2670048"/>
-            <a:ext cx="1645920" cy="475488"/>
+            <a:off x="7635240" y="2560320"/>
+            <a:ext cx="1645920" cy="429768"/>
           </a:xfrm>
           <a:prstGeom prst="rect">
             <a:avLst/>
@@ -25634,8 +26156,8 @@
         </p:nvSpPr>
         <p:spPr>
           <a:xfrm>
-            <a:off x="9326880" y="2670048"/>
-            <a:ext cx="2041855" cy="475488"/>
+            <a:off x="9326880" y="2560320"/>
+            <a:ext cx="2041855" cy="429768"/>
           </a:xfrm>
           <a:prstGeom prst="rect">
             <a:avLst/>
@@ -25673,12 +26195,12 @@
         </p:nvSpPr>
         <p:spPr>
           <a:xfrm>
-            <a:off x="640080" y="3218688"/>
-            <a:ext cx="10911535" cy="475488"/>
+            <a:off x="640080" y="3054096"/>
+            <a:ext cx="10911535" cy="429768"/>
           </a:xfrm>
           <a:prstGeom prst="roundRect">
             <a:avLst>
-              <a:gd name="adj" fmla="val 19231"/>
+              <a:gd name="adj" fmla="val 21277"/>
             </a:avLst>
           </a:prstGeom>
           <a:solidFill>
@@ -25700,8 +26222,8 @@
         </p:nvSpPr>
         <p:spPr>
           <a:xfrm>
-            <a:off x="822960" y="3282696"/>
-            <a:ext cx="347472" cy="347472"/>
+            <a:off x="822960" y="3099816"/>
+            <a:ext cx="338328" cy="338328"/>
           </a:xfrm>
           <a:prstGeom prst="ellipse">
             <a:avLst/>
@@ -25720,8 +26242,8 @@
         </p:nvSpPr>
         <p:spPr>
           <a:xfrm>
-            <a:off x="822960" y="3282696"/>
-            <a:ext cx="347472" cy="347472"/>
+            <a:off x="822960" y="3099816"/>
+            <a:ext cx="338328" cy="338328"/>
           </a:xfrm>
           <a:prstGeom prst="rect">
             <a:avLst/>
@@ -25759,8 +26281,8 @@
         </p:nvSpPr>
         <p:spPr>
           <a:xfrm>
-            <a:off x="1417320" y="3218688"/>
-            <a:ext cx="1645920" cy="475488"/>
+            <a:off x="1417320" y="3054096"/>
+            <a:ext cx="1645920" cy="429768"/>
           </a:xfrm>
           <a:prstGeom prst="rect">
             <a:avLst/>
@@ -25798,8 +26320,8 @@
         </p:nvSpPr>
         <p:spPr>
           <a:xfrm>
-            <a:off x="3108960" y="3218688"/>
-            <a:ext cx="4480560" cy="475488"/>
+            <a:off x="3108960" y="3054096"/>
+            <a:ext cx="4480560" cy="429768"/>
           </a:xfrm>
           <a:prstGeom prst="rect">
             <a:avLst/>
@@ -25815,7 +26337,7 @@
               <a:buNone/>
             </a:pPr>
             <a:r>
-              <a:rPr lang="en-US" sz="1350" dirty="0">
+              <a:rPr lang="en-US" sz="1300" dirty="0">
                 <a:solidFill>
                   <a:srgbClr val="1A2620"/>
                 </a:solidFill>
@@ -25825,7 +26347,7 @@
               </a:rPr>
               <a:t>外部影像增益 0.04、矛盾門檻 0.165（驗收文件）</a:t>
             </a:r>
-            <a:endParaRPr lang="en-US" sz="1350" dirty="0"/>
+            <a:endParaRPr lang="en-US" sz="1300" dirty="0"/>
           </a:p>
         </p:txBody>
       </p:sp>
@@ -25837,8 +26359,8 @@
         </p:nvSpPr>
         <p:spPr>
           <a:xfrm>
-            <a:off x="7635240" y="3218688"/>
-            <a:ext cx="1645920" cy="475488"/>
+            <a:off x="7635240" y="3054096"/>
+            <a:ext cx="1645920" cy="429768"/>
           </a:xfrm>
           <a:prstGeom prst="rect">
             <a:avLst/>
@@ -25876,8 +26398,8 @@
         </p:nvSpPr>
         <p:spPr>
           <a:xfrm>
-            <a:off x="9326880" y="3218688"/>
-            <a:ext cx="2041855" cy="475488"/>
+            <a:off x="9326880" y="3054096"/>
+            <a:ext cx="2041855" cy="429768"/>
           </a:xfrm>
           <a:prstGeom prst="rect">
             <a:avLst/>
@@ -25915,12 +26437,12 @@
         </p:nvSpPr>
         <p:spPr>
           <a:xfrm>
-            <a:off x="640080" y="3767328"/>
-            <a:ext cx="10911535" cy="475488"/>
+            <a:off x="640080" y="3547872"/>
+            <a:ext cx="10911535" cy="429768"/>
           </a:xfrm>
           <a:prstGeom prst="roundRect">
             <a:avLst>
-              <a:gd name="adj" fmla="val 19231"/>
+              <a:gd name="adj" fmla="val 21277"/>
             </a:avLst>
           </a:prstGeom>
           <a:solidFill>
@@ -25942,8 +26464,8 @@
         </p:nvSpPr>
         <p:spPr>
           <a:xfrm>
-            <a:off x="822960" y="3831336"/>
-            <a:ext cx="347472" cy="347472"/>
+            <a:off x="822960" y="3593592"/>
+            <a:ext cx="338328" cy="338328"/>
           </a:xfrm>
           <a:prstGeom prst="ellipse">
             <a:avLst/>
@@ -25962,8 +26484,8 @@
         </p:nvSpPr>
         <p:spPr>
           <a:xfrm>
-            <a:off x="822960" y="3831336"/>
-            <a:ext cx="347472" cy="347472"/>
+            <a:off x="822960" y="3593592"/>
+            <a:ext cx="338328" cy="338328"/>
           </a:xfrm>
           <a:prstGeom prst="rect">
             <a:avLst/>
@@ -26001,8 +26523,8 @@
         </p:nvSpPr>
         <p:spPr>
           <a:xfrm>
-            <a:off x="1417320" y="3767328"/>
-            <a:ext cx="1645920" cy="475488"/>
+            <a:off x="1417320" y="3547872"/>
+            <a:ext cx="1645920" cy="429768"/>
           </a:xfrm>
           <a:prstGeom prst="rect">
             <a:avLst/>
@@ -26040,8 +26562,8 @@
         </p:nvSpPr>
         <p:spPr>
           <a:xfrm>
-            <a:off x="3108960" y="3767328"/>
-            <a:ext cx="4480560" cy="475488"/>
+            <a:off x="3108960" y="3547872"/>
+            <a:ext cx="4480560" cy="429768"/>
           </a:xfrm>
           <a:prstGeom prst="rect">
             <a:avLst/>
@@ -26057,7 +26579,7 @@
               <a:buNone/>
             </a:pPr>
             <a:r>
-              <a:rPr lang="en-US" sz="1350" dirty="0">
+              <a:rPr lang="en-US" sz="1300" dirty="0">
                 <a:solidFill>
                   <a:srgbClr val="1A2620"/>
                 </a:solidFill>
@@ -26067,7 +26589,7 @@
               </a:rPr>
               <a:t>v12.3 高階裝置門檻，新增「連續跑也要 ≤ 40 ms」</a:t>
             </a:r>
-            <a:endParaRPr lang="en-US" sz="1350" dirty="0"/>
+            <a:endParaRPr lang="en-US" sz="1300" dirty="0"/>
           </a:p>
         </p:txBody>
       </p:sp>
@@ -26079,8 +26601,8 @@
         </p:nvSpPr>
         <p:spPr>
           <a:xfrm>
-            <a:off x="7635240" y="3767328"/>
-            <a:ext cx="1645920" cy="475488"/>
+            <a:off x="7635240" y="3547872"/>
+            <a:ext cx="1645920" cy="429768"/>
           </a:xfrm>
           <a:prstGeom prst="rect">
             <a:avLst/>
@@ -26118,8 +26640,8 @@
         </p:nvSpPr>
         <p:spPr>
           <a:xfrm>
-            <a:off x="9326880" y="3767328"/>
-            <a:ext cx="2041855" cy="475488"/>
+            <a:off x="9326880" y="3547872"/>
+            <a:ext cx="2041855" cy="429768"/>
           </a:xfrm>
           <a:prstGeom prst="rect">
             <a:avLst/>
@@ -26157,12 +26679,12 @@
         </p:nvSpPr>
         <p:spPr>
           <a:xfrm>
-            <a:off x="640080" y="4315968"/>
-            <a:ext cx="10911535" cy="475488"/>
+            <a:off x="640080" y="4041648"/>
+            <a:ext cx="10911535" cy="429768"/>
           </a:xfrm>
           <a:prstGeom prst="roundRect">
             <a:avLst>
-              <a:gd name="adj" fmla="val 19231"/>
+              <a:gd name="adj" fmla="val 21277"/>
             </a:avLst>
           </a:prstGeom>
           <a:solidFill>
@@ -26184,8 +26706,8 @@
         </p:nvSpPr>
         <p:spPr>
           <a:xfrm>
-            <a:off x="822960" y="4379976"/>
-            <a:ext cx="347472" cy="347472"/>
+            <a:off x="822960" y="4087368"/>
+            <a:ext cx="338328" cy="338328"/>
           </a:xfrm>
           <a:prstGeom prst="ellipse">
             <a:avLst/>
@@ -26204,8 +26726,8 @@
         </p:nvSpPr>
         <p:spPr>
           <a:xfrm>
-            <a:off x="822960" y="4379976"/>
-            <a:ext cx="347472" cy="347472"/>
+            <a:off x="822960" y="4087368"/>
+            <a:ext cx="338328" cy="338328"/>
           </a:xfrm>
           <a:prstGeom prst="rect">
             <a:avLst/>
@@ -26243,8 +26765,8 @@
         </p:nvSpPr>
         <p:spPr>
           <a:xfrm>
-            <a:off x="1417320" y="4315968"/>
-            <a:ext cx="1645920" cy="475488"/>
+            <a:off x="1417320" y="4041648"/>
+            <a:ext cx="1645920" cy="429768"/>
           </a:xfrm>
           <a:prstGeom prst="rect">
             <a:avLst/>
@@ -26282,8 +26804,8 @@
         </p:nvSpPr>
         <p:spPr>
           <a:xfrm>
-            <a:off x="3108960" y="4315968"/>
-            <a:ext cx="4480560" cy="475488"/>
+            <a:off x="3108960" y="4041648"/>
+            <a:ext cx="4480560" cy="429768"/>
           </a:xfrm>
           <a:prstGeom prst="rect">
             <a:avLst/>
@@ -26299,7 +26821,7 @@
               <a:buNone/>
             </a:pPr>
             <a:r>
-              <a:rPr lang="en-US" sz="1350" dirty="0">
+              <a:rPr lang="en-US" sz="1300" dirty="0">
                 <a:solidFill>
                   <a:srgbClr val="1A2620"/>
                 </a:solidFill>
@@ -26309,7 +26831,7 @@
               </a:rPr>
               <a:t>320 取 e2e1、兩組之間冷卻看表面溫度</a:t>
             </a:r>
-            <a:endParaRPr lang="en-US" sz="1350" dirty="0"/>
+            <a:endParaRPr lang="en-US" sz="1300" dirty="0"/>
           </a:p>
         </p:txBody>
       </p:sp>
@@ -26321,8 +26843,8 @@
         </p:nvSpPr>
         <p:spPr>
           <a:xfrm>
-            <a:off x="7635240" y="4315968"/>
-            <a:ext cx="1645920" cy="475488"/>
+            <a:off x="7635240" y="4041648"/>
+            <a:ext cx="1645920" cy="429768"/>
           </a:xfrm>
           <a:prstGeom prst="rect">
             <a:avLst/>
@@ -26360,8 +26882,8 @@
         </p:nvSpPr>
         <p:spPr>
           <a:xfrm>
-            <a:off x="9326880" y="4315968"/>
-            <a:ext cx="2041855" cy="475488"/>
+            <a:off x="9326880" y="4041648"/>
+            <a:ext cx="2041855" cy="429768"/>
           </a:xfrm>
           <a:prstGeom prst="rect">
             <a:avLst/>
@@ -26399,12 +26921,12 @@
         </p:nvSpPr>
         <p:spPr>
           <a:xfrm>
-            <a:off x="640080" y="4864608"/>
-            <a:ext cx="10911535" cy="475488"/>
+            <a:off x="640080" y="4535424"/>
+            <a:ext cx="10911535" cy="429768"/>
           </a:xfrm>
           <a:prstGeom prst="roundRect">
             <a:avLst>
-              <a:gd name="adj" fmla="val 19231"/>
+              <a:gd name="adj" fmla="val 21277"/>
             </a:avLst>
           </a:prstGeom>
           <a:solidFill>
@@ -26426,8 +26948,8 @@
         </p:nvSpPr>
         <p:spPr>
           <a:xfrm>
-            <a:off x="822960" y="4928616"/>
-            <a:ext cx="347472" cy="347472"/>
+            <a:off x="822960" y="4581144"/>
+            <a:ext cx="338328" cy="338328"/>
           </a:xfrm>
           <a:prstGeom prst="ellipse">
             <a:avLst/>
@@ -26446,8 +26968,8 @@
         </p:nvSpPr>
         <p:spPr>
           <a:xfrm>
-            <a:off x="822960" y="4928616"/>
-            <a:ext cx="347472" cy="347472"/>
+            <a:off x="822960" y="4581144"/>
+            <a:ext cx="338328" cy="338328"/>
           </a:xfrm>
           <a:prstGeom prst="rect">
             <a:avLst/>
@@ -26485,8 +27007,8 @@
         </p:nvSpPr>
         <p:spPr>
           <a:xfrm>
-            <a:off x="1417320" y="4864608"/>
-            <a:ext cx="1645920" cy="475488"/>
+            <a:off x="1417320" y="4535424"/>
+            <a:ext cx="1645920" cy="429768"/>
           </a:xfrm>
           <a:prstGeom prst="rect">
             <a:avLst/>
@@ -26524,8 +27046,8 @@
         </p:nvSpPr>
         <p:spPr>
           <a:xfrm>
-            <a:off x="3108960" y="4864608"/>
-            <a:ext cx="4480560" cy="475488"/>
+            <a:off x="3108960" y="4535424"/>
+            <a:ext cx="4480560" cy="429768"/>
           </a:xfrm>
           <a:prstGeom prst="rect">
             <a:avLst/>
@@ -26541,7 +27063,7 @@
               <a:buNone/>
             </a:pPr>
             <a:r>
-              <a:rPr lang="en-US" sz="1350" dirty="0">
+              <a:rPr lang="en-US" sz="1300" dirty="0">
                 <a:solidFill>
                   <a:srgbClr val="1A2620"/>
                 </a:solidFill>
@@ -26551,7 +27073,7 @@
               </a:rPr>
               <a:t>溫度讀取改為不分廠牌</a:t>
             </a:r>
-            <a:endParaRPr lang="en-US" sz="1350" dirty="0"/>
+            <a:endParaRPr lang="en-US" sz="1300" dirty="0"/>
           </a:p>
         </p:txBody>
       </p:sp>
@@ -26563,8 +27085,8 @@
         </p:nvSpPr>
         <p:spPr>
           <a:xfrm>
-            <a:off x="7635240" y="4864608"/>
-            <a:ext cx="1645920" cy="475488"/>
+            <a:off x="7635240" y="4535424"/>
+            <a:ext cx="1645920" cy="429768"/>
           </a:xfrm>
           <a:prstGeom prst="rect">
             <a:avLst/>
@@ -26602,8 +27124,8 @@
         </p:nvSpPr>
         <p:spPr>
           <a:xfrm>
-            <a:off x="9326880" y="4864608"/>
-            <a:ext cx="2041855" cy="475488"/>
+            <a:off x="9326880" y="4535424"/>
+            <a:ext cx="2041855" cy="429768"/>
           </a:xfrm>
           <a:prstGeom prst="rect">
             <a:avLst/>
@@ -26641,12 +27163,12 @@
         </p:nvSpPr>
         <p:spPr>
           <a:xfrm>
-            <a:off x="640080" y="5413248"/>
-            <a:ext cx="10911535" cy="475488"/>
+            <a:off x="640080" y="5029200"/>
+            <a:ext cx="10911535" cy="429768"/>
           </a:xfrm>
           <a:prstGeom prst="roundRect">
             <a:avLst>
-              <a:gd name="adj" fmla="val 19231"/>
+              <a:gd name="adj" fmla="val 21277"/>
             </a:avLst>
           </a:prstGeom>
           <a:solidFill>
@@ -26668,8 +27190,8 @@
         </p:nvSpPr>
         <p:spPr>
           <a:xfrm>
-            <a:off x="822960" y="5477256"/>
-            <a:ext cx="347472" cy="347472"/>
+            <a:off x="822960" y="5074920"/>
+            <a:ext cx="338328" cy="338328"/>
           </a:xfrm>
           <a:prstGeom prst="ellipse">
             <a:avLst/>
@@ -26688,8 +27210,8 @@
         </p:nvSpPr>
         <p:spPr>
           <a:xfrm>
-            <a:off x="822960" y="5477256"/>
-            <a:ext cx="347472" cy="347472"/>
+            <a:off x="822960" y="5074920"/>
+            <a:ext cx="338328" cy="338328"/>
           </a:xfrm>
           <a:prstGeom prst="rect">
             <a:avLst/>
@@ -26727,8 +27249,8 @@
         </p:nvSpPr>
         <p:spPr>
           <a:xfrm>
-            <a:off x="1417320" y="5413248"/>
-            <a:ext cx="1645920" cy="475488"/>
+            <a:off x="1417320" y="5029200"/>
+            <a:ext cx="1645920" cy="429768"/>
           </a:xfrm>
           <a:prstGeom prst="rect">
             <a:avLst/>
@@ -26766,8 +27288,8 @@
         </p:nvSpPr>
         <p:spPr>
           <a:xfrm>
-            <a:off x="3108960" y="5413248"/>
-            <a:ext cx="4480560" cy="475488"/>
+            <a:off x="3108960" y="5029200"/>
+            <a:ext cx="4480560" cy="429768"/>
           </a:xfrm>
           <a:prstGeom prst="rect">
             <a:avLst/>
@@ -26783,7 +27305,7 @@
               <a:buNone/>
             </a:pPr>
             <a:r>
-              <a:rPr lang="en-US" sz="1350" dirty="0">
+              <a:rPr lang="en-US" sz="1300" dirty="0">
                 <a:solidFill>
                   <a:srgbClr val="1A2620"/>
                 </a:solidFill>
@@ -26793,7 +27315,7 @@
               </a:rPr>
               <a:t>662 補量協定登記</a:t>
             </a:r>
-            <a:endParaRPr lang="en-US" sz="1350" dirty="0"/>
+            <a:endParaRPr lang="en-US" sz="1300" dirty="0"/>
           </a:p>
         </p:txBody>
       </p:sp>
@@ -26805,8 +27327,8 @@
         </p:nvSpPr>
         <p:spPr>
           <a:xfrm>
-            <a:off x="7635240" y="5413248"/>
-            <a:ext cx="1645920" cy="475488"/>
+            <a:off x="7635240" y="5029200"/>
+            <a:ext cx="1645920" cy="429768"/>
           </a:xfrm>
           <a:prstGeom prst="rect">
             <a:avLst/>
@@ -26844,8 +27366,8 @@
         </p:nvSpPr>
         <p:spPr>
           <a:xfrm>
-            <a:off x="9326880" y="5413248"/>
-            <a:ext cx="2041855" cy="475488"/>
+            <a:off x="9326880" y="5029200"/>
+            <a:ext cx="2041855" cy="429768"/>
           </a:xfrm>
           <a:prstGeom prst="rect">
             <a:avLst/>
@@ -26877,7 +27399,249 @@
       </p:sp>
       <p:sp>
         <p:nvSpPr>
-          <p:cNvPr id="60" name="Text 58"/>
+          <p:cNvPr id="60" name="Shape 58"/>
+          <p:cNvSpPr/>
+          <p:nvPr/>
+        </p:nvSpPr>
+        <p:spPr>
+          <a:xfrm>
+            <a:off x="640080" y="5522976"/>
+            <a:ext cx="10911535" cy="429768"/>
+          </a:xfrm>
+          <a:prstGeom prst="roundRect">
+            <a:avLst>
+              <a:gd name="adj" fmla="val 21277"/>
+            </a:avLst>
+          </a:prstGeom>
+          <a:solidFill>
+            <a:srgbClr val="F6F9F7"/>
+          </a:solidFill>
+          <a:ln w="12700">
+            <a:solidFill>
+              <a:srgbClr val="F6F9F7"/>
+            </a:solidFill>
+            <a:prstDash val="solid"/>
+          </a:ln>
+        </p:spPr>
+      </p:sp>
+      <p:sp>
+        <p:nvSpPr>
+          <p:cNvPr id="61" name="Shape 59"/>
+          <p:cNvSpPr/>
+          <p:nvPr/>
+        </p:nvSpPr>
+        <p:spPr>
+          <a:xfrm>
+            <a:off x="822960" y="5568696"/>
+            <a:ext cx="338328" cy="338328"/>
+          </a:xfrm>
+          <a:prstGeom prst="ellipse">
+            <a:avLst/>
+          </a:prstGeom>
+          <a:solidFill>
+            <a:srgbClr val="2C5F45"/>
+          </a:solidFill>
+          <a:ln/>
+        </p:spPr>
+      </p:sp>
+      <p:sp>
+        <p:nvSpPr>
+          <p:cNvPr id="62" name="Text 60"/>
+          <p:cNvSpPr txBox="1"/>
+          <p:nvPr/>
+        </p:nvSpPr>
+        <p:spPr>
+          <a:xfrm>
+            <a:off x="822960" y="5568696"/>
+            <a:ext cx="338328" cy="338328"/>
+          </a:xfrm>
+          <a:prstGeom prst="rect">
+            <a:avLst/>
+          </a:prstGeom>
+          <a:noFill/>
+          <a:ln/>
+        </p:spPr>
+        <p:txBody>
+          <a:bodyPr wrap="square" lIns="0" tIns="0" rIns="0" bIns="0" rtlCol="0" anchor="ctr"/>
+          <a:lstStyle/>
+          <a:p>
+            <a:pPr algn="ctr" indent="0" marL="0">
+              <a:buNone/>
+            </a:pPr>
+            <a:r>
+              <a:rPr lang="en-US" sz="1000" b="1" dirty="0">
+                <a:solidFill>
+                  <a:srgbClr val="FFFFFF"/>
+                </a:solidFill>
+                <a:latin typeface="Microsoft JhengHei" pitchFamily="34" charset="0"/>
+                <a:ea typeface="Microsoft JhengHei" pitchFamily="34" charset="-122"/>
+                <a:cs typeface="Microsoft JhengHei" pitchFamily="34" charset="-120"/>
+              </a:rPr>
+              <a:t>9</a:t>
+            </a:r>
+            <a:endParaRPr lang="en-US" sz="1000" dirty="0"/>
+          </a:p>
+        </p:txBody>
+      </p:sp>
+      <p:sp>
+        <p:nvSpPr>
+          <p:cNvPr id="63" name="Text 61"/>
+          <p:cNvSpPr txBox="1"/>
+          <p:nvPr/>
+        </p:nvSpPr>
+        <p:spPr>
+          <a:xfrm>
+            <a:off x="1417320" y="5522976"/>
+            <a:ext cx="1645920" cy="429768"/>
+          </a:xfrm>
+          <a:prstGeom prst="rect">
+            <a:avLst/>
+          </a:prstGeom>
+          <a:noFill/>
+          <a:ln/>
+        </p:spPr>
+        <p:txBody>
+          <a:bodyPr wrap="square" lIns="0" tIns="0" rIns="0" bIns="0" rtlCol="0" anchor="ctr"/>
+          <a:lstStyle/>
+          <a:p>
+            <a:pPr indent="0" marL="0">
+              <a:buNone/>
+            </a:pPr>
+            <a:r>
+              <a:rPr lang="en-US" sz="1300" b="1" dirty="0">
+                <a:solidFill>
+                  <a:srgbClr val="0F2E22"/>
+                </a:solidFill>
+                <a:latin typeface="Microsoft JhengHei" pitchFamily="34" charset="0"/>
+                <a:ea typeface="Microsoft JhengHei" pitchFamily="34" charset="-122"/>
+                <a:cs typeface="Microsoft JhengHei" pitchFamily="34" charset="-120"/>
+              </a:rPr>
+              <a:t>09-15 00:00</a:t>
+            </a:r>
+            <a:endParaRPr lang="en-US" sz="1300" dirty="0"/>
+          </a:p>
+        </p:txBody>
+      </p:sp>
+      <p:sp>
+        <p:nvSpPr>
+          <p:cNvPr id="64" name="Text 62"/>
+          <p:cNvSpPr txBox="1"/>
+          <p:nvPr/>
+        </p:nvSpPr>
+        <p:spPr>
+          <a:xfrm>
+            <a:off x="3108960" y="5522976"/>
+            <a:ext cx="4480560" cy="429768"/>
+          </a:xfrm>
+          <a:prstGeom prst="rect">
+            <a:avLst/>
+          </a:prstGeom>
+          <a:noFill/>
+          <a:ln/>
+        </p:spPr>
+        <p:txBody>
+          <a:bodyPr wrap="square" lIns="0" tIns="0" rIns="0" bIns="0" rtlCol="0" anchor="ctr"/>
+          <a:lstStyle/>
+          <a:p>
+            <a:pPr indent="0" marL="0">
+              <a:buNone/>
+            </a:pPr>
+            <a:r>
+              <a:rPr lang="en-US" sz="1300" dirty="0">
+                <a:solidFill>
+                  <a:srgbClr val="1A2620"/>
+                </a:solidFill>
+                <a:latin typeface="Microsoft JhengHei" pitchFamily="34" charset="0"/>
+                <a:ea typeface="Microsoft JhengHei" pitchFamily="34" charset="-122"/>
+                <a:cs typeface="Microsoft JhengHei" pitchFamily="34" charset="-120"/>
+              </a:rPr>
+              <a:t>平板補量 416 end2end 關（精度按變體更正後最準的組合）</a:t>
+            </a:r>
+            <a:endParaRPr lang="en-US" sz="1300" dirty="0"/>
+          </a:p>
+        </p:txBody>
+      </p:sp>
+      <p:sp>
+        <p:nvSpPr>
+          <p:cNvPr id="65" name="Text 63"/>
+          <p:cNvSpPr txBox="1"/>
+          <p:nvPr/>
+        </p:nvSpPr>
+        <p:spPr>
+          <a:xfrm>
+            <a:off x="7635240" y="5522976"/>
+            <a:ext cx="1645920" cy="429768"/>
+          </a:xfrm>
+          <a:prstGeom prst="rect">
+            <a:avLst/>
+          </a:prstGeom>
+          <a:noFill/>
+          <a:ln/>
+        </p:spPr>
+        <p:txBody>
+          <a:bodyPr wrap="square" lIns="0" tIns="0" rIns="0" bIns="0" rtlCol="0" anchor="ctr"/>
+          <a:lstStyle/>
+          <a:p>
+            <a:pPr indent="0" marL="0">
+              <a:buNone/>
+            </a:pPr>
+            <a:r>
+              <a:rPr lang="en-US" sz="1200" dirty="0">
+                <a:solidFill>
+                  <a:srgbClr val="5E6F66"/>
+                </a:solidFill>
+                <a:latin typeface="Consolas" pitchFamily="34" charset="0"/>
+                <a:ea typeface="Consolas" pitchFamily="34" charset="-122"/>
+                <a:cs typeface="Consolas" pitchFamily="34" charset="-120"/>
+              </a:rPr>
+              <a:t>f2f76d3</a:t>
+            </a:r>
+            <a:endParaRPr lang="en-US" sz="1200" dirty="0"/>
+          </a:p>
+        </p:txBody>
+      </p:sp>
+      <p:sp>
+        <p:nvSpPr>
+          <p:cNvPr id="66" name="Text 64"/>
+          <p:cNvSpPr txBox="1"/>
+          <p:nvPr/>
+        </p:nvSpPr>
+        <p:spPr>
+          <a:xfrm>
+            <a:off x="9326880" y="5522976"/>
+            <a:ext cx="2041855" cy="429768"/>
+          </a:xfrm>
+          <a:prstGeom prst="rect">
+            <a:avLst/>
+          </a:prstGeom>
+          <a:noFill/>
+          <a:ln/>
+        </p:spPr>
+        <p:txBody>
+          <a:bodyPr wrap="square" lIns="0" tIns="0" rIns="0" bIns="0" rtlCol="0" anchor="ctr"/>
+          <a:lstStyle/>
+          <a:p>
+            <a:pPr indent="0" marL="0">
+              <a:buNone/>
+            </a:pPr>
+            <a:r>
+              <a:rPr lang="en-US" sz="1250" b="1" dirty="0">
+                <a:solidFill>
+                  <a:srgbClr val="2C5F45"/>
+                </a:solidFill>
+                <a:latin typeface="Microsoft JhengHei" pitchFamily="34" charset="0"/>
+                <a:ea typeface="Microsoft JhengHei" pitchFamily="34" charset="-122"/>
+                <a:cs typeface="Microsoft JhengHei" pitchFamily="34" charset="-120"/>
+              </a:rPr>
+              <a:t>00:01 才開始量</a:t>
+            </a:r>
+            <a:endParaRPr lang="en-US" sz="1250" dirty="0"/>
+          </a:p>
+        </p:txBody>
+      </p:sp>
+      <p:sp>
+        <p:nvSpPr>
+          <p:cNvPr id="67" name="Text 65"/>
           <p:cNvSpPr txBox="1"/>
           <p:nvPr/>
         </p:nvSpPr>
@@ -27470,7 +28234,7 @@
                           <a:ea typeface="Microsoft JhengHei" pitchFamily="34" charset="-122"/>
                           <a:cs typeface="Microsoft JhengHei" pitchFamily="34" charset="-120"/>
                         </a:rPr>
-                        <a:t>那為什麼要換成 v5.7？</a:t>
+                        <a:t>那為什麼要換成 v5.7 資料集？</a:t>
                       </a:r>
                       <a:endParaRPr lang="en-US" sz="1200" dirty="0">
                         <a:latin typeface="Microsoft JhengHei" charset="0"/>
@@ -27535,7 +28299,7 @@
                           <a:ea typeface="Microsoft JhengHei" pitchFamily="34" charset="-122"/>
                           <a:cs typeface="Microsoft JhengHei" pitchFamily="34" charset="-120"/>
                         </a:rPr>
-                        <a:t>舊的薊馬葉害框彼此矛盾，那個類別的數字量到的是標註噪聲；換了之後數字才有解釋力</a:t>
+                        <a:t>模型還是 v11.5，只換資料集。舊的薊馬葉害框彼此矛盾，那個類別的數字量到的是標註噪聲；換了之後數字才有解釋力</a:t>
                       </a:r>
                       <a:endParaRPr lang="en-US" sz="1200" dirty="0">
                         <a:latin typeface="Microsoft JhengHei" charset="0"/>
@@ -29068,7 +29832,7 @@
                           <a:ea typeface="Microsoft JhengHei" pitchFamily="34" charset="-122"/>
                           <a:cs typeface="Microsoft JhengHei" pitchFamily="34" charset="-120"/>
                         </a:rPr>
-                        <a:t>662 的結論會改嗎？</a:t>
+                        <a:t>平板 416 上次沒量，現在呢？</a:t>
                       </a:r>
                       <a:endParaRPr lang="en-US" sz="1200" dirty="0">
                         <a:latin typeface="Microsoft JhengHei" charset="0"/>
@@ -29133,7 +29897,7 @@
                           <a:ea typeface="Microsoft JhengHei" pitchFamily="34" charset="-122"/>
                           <a:cs typeface="Microsoft JhengHei" pitchFamily="34" charset="-120"/>
                         </a:rPr>
-                        <a:t>不會。662 的問題是晶片速度，換模型、調參數、用 GPU 都補不上</a:t>
+                        <a:t>09-15 補量：它是短時間過線中最準的（0.815），當時精度表寫錯才漏掉；照原規則補量，第 9 段起超過 40 ms，平板仍只到 320</a:t>
                       </a:r>
                       <a:endParaRPr lang="en-US" sz="1200" dirty="0">
                         <a:latin typeface="Microsoft JhengHei" charset="0"/>
@@ -29332,7 +30096,7 @@
                           <a:ea typeface="Microsoft JhengHei" pitchFamily="34" charset="-122"/>
                           <a:cs typeface="Microsoft JhengHei" pitchFamily="34" charset="-120"/>
                         </a:rPr>
-                        <a:t>這些判準是不是看完結果才訂的？</a:t>
+                        <a:t>這些判準、數字可信嗎？</a:t>
                       </a:r>
                       <a:endParaRPr lang="en-US" sz="1200" dirty="0">
                         <a:latin typeface="Microsoft JhengHei" charset="0"/>
@@ -29397,7 +30161,7 @@
                           <a:ea typeface="Microsoft JhengHei" pitchFamily="34" charset="-122"/>
                           <a:cs typeface="Microsoft JhengHei" pitchFamily="34" charset="-120"/>
                         </a:rPr>
-                        <a:t>不是。每一份判準都比量測早 commit，時間可以從 git 紀錄查到（見前一頁）</a:t>
+                        <a:t>判準都比量測早 commit（見前一頁）；09-15 凌晨也用原始輸出把數字全核對過一次，更正處見週報 §5.1</a:t>
                       </a:r>
                       <a:endParaRPr lang="en-US" sz="1200" dirty="0">
                         <a:latin typeface="Microsoft JhengHei" charset="0"/>
@@ -29874,7 +30638,7 @@
                 <a:ea typeface="Microsoft JhengHei" pitchFamily="34" charset="-122"/>
                 <a:cs typeface="Microsoft JhengHei" pitchFamily="34" charset="-120"/>
               </a:rPr>
-              <a:t>交付換成 v5.7 後，標註沒變的八類平均 AP50 變化</a:t>
+              <a:t>交付權重改用 v5.7 資料集訓練後，標註沒變的八類平均 AP50 變化</a:t>
             </a:r>
             <a:endParaRPr lang="en-US" sz="1400" dirty="0"/>
           </a:p>
@@ -29933,7 +30697,7 @@
                 <a:ea typeface="Microsoft JhengHei" pitchFamily="34" charset="-122"/>
                 <a:cs typeface="Microsoft JhengHei" pitchFamily="34" charset="-120"/>
               </a:rPr>
-              <a:t>換 v5.7 是讓數字可信</a:t>
+              <a:t>換資料集是讓數字可信</a:t>
             </a:r>
             <a:endParaRPr lang="en-US" sz="1400" dirty="0"/>
           </a:p>
@@ -34453,7 +35217,7 @@
                 <a:ea typeface="Microsoft JhengHei" pitchFamily="34" charset="-122"/>
                 <a:cs typeface="Microsoft JhengHei" pitchFamily="34" charset="-120"/>
               </a:rPr>
-              <a:t>512 短時間 25 FPS 過線，連續跑剩 16</a:t>
+              <a:t>416 短時間 37 FPS，連續跑剩 24；512 剩 16</a:t>
             </a:r>
             <a:endParaRPr lang="en-US" sz="1200" dirty="0"/>
           </a:p>
@@ -34799,7 +35563,7 @@
                 <a:ea typeface="Microsoft JhengHei" pitchFamily="34" charset="-122"/>
                 <a:cs typeface="Microsoft JhengHei" pitchFamily="34" charset="-120"/>
               </a:rPr>
-              <a:t>連續 10 段、每段約 30 秒的平均延遲（ms）——越高越慢，40 ms 以上就不及格</a:t>
+              <a:t>連續 10 段、每段約 30 秒的平均延遲（ms）——越高越慢，40 ms 以上就不及格　·　平板 416 含 2 ms 後處理保留</a:t>
             </a:r>
             <a:endParaRPr lang="en-US" sz="1500" dirty="0"/>
           </a:p>
@@ -34881,7 +35645,7 @@
                 <a:ea typeface="Microsoft JhengHei" pitchFamily="34" charset="-122"/>
                 <a:cs typeface="Microsoft JhengHei" pitchFamily="34" charset="-120"/>
               </a:rPr>
-              <a:t>平板 · 512 解析度</a:t>
+              <a:t>平板 · 416 解析度</a:t>
             </a:r>
             <a:endParaRPr lang="en-US" sz="1200" dirty="0"/>
           </a:p>
@@ -34920,7 +35684,7 @@
                 <a:ea typeface="Microsoft JhengHei" pitchFamily="34" charset="-122"/>
                 <a:cs typeface="Microsoft JhengHei" pitchFamily="34" charset="-120"/>
               </a:rPr>
-              <a:t>25 → 16 FPS</a:t>
+              <a:t>37 → 24 FPS</a:t>
             </a:r>
             <a:endParaRPr lang="en-US" sz="2200" dirty="0"/>
           </a:p>
@@ -34959,7 +35723,7 @@
                 <a:ea typeface="Microsoft JhengHei" pitchFamily="34" charset="-122"/>
                 <a:cs typeface="Microsoft JhengHei" pitchFamily="34" charset="-120"/>
               </a:rPr>
-              <a:t>頭 30 秒表面 35 → 47 °C，開始降頻</a:t>
+              <a:t>頭 30 秒表面 34 → 47 °C，第 9 段起超線</a:t>
             </a:r>
             <a:endParaRPr lang="en-US" sz="1150" dirty="0"/>
           </a:p>
@@ -36334,7 +37098,7 @@
                 <a:ea typeface="Microsoft JhengHei" pitchFamily="34" charset="-122"/>
                 <a:cs typeface="Microsoft JhengHei" pitchFamily="34" charset="-120"/>
               </a:rPr>
-              <a:t>選定之後只需要把 v5.7 的權重重新匯出那一個組合、重評精度。</a:t>
+              <a:t>選定之後只需要用交付權重（v5.7 資料集訓練）重新匯出那一個組合、重評精度。</a:t>
             </a:r>
             <a:endParaRPr lang="en-US" sz="1400" dirty="0"/>
           </a:p>

--- a/docs/v12.3_簡報_口頭報告.pptx
+++ b/docs/v12.3_簡報_口頭報告.pptx
@@ -230,7 +230,7 @@
               <c:strCache>
                 <c:ptCount val="1"/>
                 <c:pt idx="0">
-                  <c:v>v11.5（v5.7 資料集，新標註）</c:v>
+                  <c:v>v13（v5.7 資料集，新標註）</c:v>
                 </c:pt>
               </c:strCache>
             </c:strRef>
@@ -2261,7 +2261,7 @@
           <a:p>
             <a:r>
               <a:rPr lang="en-US" dirty="0"/>
-              <a:t>【約 30 秒】開場先講這句話，再進三個數字。全場骨架：標註修好 → 交付改用 v5.7 資料集重訓（但模型沒變好）→ 即時辨識變成分裝置 → 三個要當場定的決策。</a:t>
+              <a:t>【約 30 秒】開場先講這句話，再進三個數字。全場骨架：標註修好 → 交付改為 v13（v11.5 的訓練碼在 v5.7 資料集上重訓，模型沒變好）→ 即時辨識變成分裝置 → 三個要當場定的決策。</a:t>
             </a:r>
             <a:endParaRPr lang="en-US" dirty="0"/>
           </a:p>
@@ -3581,7 +3581,7 @@
           <a:p>
             <a:r>
               <a:rPr lang="en-US" dirty="0"/>
-              <a:t>【約 1 分鐘】看圖：左邊九類變高、中間八類沒動、右邊薊馬葉害跳上去。那一跳是框定義換掉，不是模型能力。模型兩邊都是 v11.5，只換了資料集；換的理由是數字有解釋力，不是分數變高。</a:t>
+              <a:t>【約 1 分鐘】看圖：左邊九類變高、中間八類沒動、右邊薊馬葉害跳上去。那一跳是框定義換掉，不是模型能力。v13 和 v11.5 的訓練碼相同，只換了資料集；換的理由是數字有解釋力，不是分數變高。</a:t>
             </a:r>
             <a:endParaRPr lang="en-US" dirty="0"/>
           </a:p>
@@ -4417,7 +4417,7 @@
                 <a:ea typeface="Microsoft JhengHei" pitchFamily="34" charset="-122"/>
                 <a:cs typeface="Microsoft JhengHei" pitchFamily="34" charset="-120"/>
               </a:rPr>
-              <a:t>v12.1 → v12.3　·　2026-09-15　週二下午進度會議</a:t>
+              <a:t>v12.1 → v12.3（本期工作編號）　·　交付模型 v13　·　2026-09-15 週二下午進度會議</a:t>
             </a:r>
             <a:endParaRPr lang="en-US" sz="1600" dirty="0"/>
           </a:p>
@@ -4522,7 +4522,7 @@
                 <a:ea typeface="Microsoft JhengHei" pitchFamily="34" charset="-122"/>
                 <a:cs typeface="Microsoft JhengHei" pitchFamily="34" charset="-120"/>
               </a:rPr>
-              <a:t>標註的問題找到根因並修好、交付權重改用 v5.7 資料集重訓、兩台高階裝置上即時辨識成立——但都只到 320 解析度；不新拍照片的前提下，工程手段已經用盡。</a:t>
+              <a:t>標註的問題找到根因並修好、交付模型改為 v13（v5.7 資料集重訓）、兩台高階裝置上即時辨識成立——但都只到 320 解析度；不新拍照片的前提下，工程手段已經用盡。</a:t>
             </a:r>
             <a:endParaRPr lang="en-US" sz="1800" dirty="0"/>
           </a:p>
@@ -4999,7 +4999,7 @@
                 <a:ea typeface="Microsoft JhengHei" pitchFamily="34" charset="-122"/>
                 <a:cs typeface="Microsoft JhengHei" pitchFamily="34" charset="-120"/>
               </a:rPr>
-              <a:t>選定拍照模式的組合，以交付權重重新匯出並重評精度</a:t>
+              <a:t>選定拍照模式的組合，以 v13 重新匯出並重評精度</a:t>
             </a:r>
             <a:endParaRPr lang="en-US" sz="1350" dirty="0"/>
           </a:p>
@@ -5580,7 +5580,7 @@
                 <a:ea typeface="Microsoft JhengHei" pitchFamily="34" charset="-122"/>
                 <a:cs typeface="Microsoft JhengHei" pitchFamily="34" charset="-120"/>
               </a:rPr>
-              <a:t>交付模型 v11.5（v5.7 資料集）：規格與指標</a:t>
+              <a:t>交付模型 v13：規格與指標</a:t>
             </a:r>
             <a:endParaRPr lang="en-US" sz="3200" dirty="0"/>
           </a:p>
@@ -5619,7 +5619,7 @@
                 <a:ea typeface="Microsoft JhengHei" pitchFamily="34" charset="-122"/>
                 <a:cs typeface="Microsoft JhengHei" pitchFamily="34" charset="-120"/>
               </a:rPr>
-              <a:t>v5.7 是資料集版本，訓練碼與架構都是 v11.5（run v5.7_v11_5）　·　valid、test 各 401 張</a:t>
+              <a:t>v13 = v11.5 訓練碼 ＋ v5.7 資料集（run v5.7_v11_5）；v5.7 是資料集版本　·　valid、test 各 401 張</a:t>
             </a:r>
             <a:endParaRPr lang="en-US" sz="1500" dirty="0"/>
           </a:p>
@@ -8407,7 +8407,7 @@
                 <a:ea typeface="Microsoft JhengHei" pitchFamily="34" charset="-122"/>
                 <a:cs typeface="Microsoft JhengHei" pitchFamily="34" charset="-120"/>
               </a:rPr>
-              <a:t>九類 test mAP50 0.861 不可與上一版（v5.6 資料集）的 0.810 相比（薊馬葉害換了框定義）；標註沒變的八類平均 0.853 → 0.851，等於沒變。手機上的 TFLite 仍是 v11.5（v5.6 資料集）權重匯出。</a:t>
+              <a:t>九類 test mAP50 0.861 不可與上一版（v5.6 資料集）的 0.810 相比（薊馬葉害換了框定義）；標註沒變的八類平均 0.853 → 0.851，等於沒變。手機上的 TFLite 仍是 v11.5（v5.6 資料集）權重匯出，v13 尚未匯出。</a:t>
             </a:r>
             <a:endParaRPr lang="en-US" sz="1250" dirty="0"/>
           </a:p>
@@ -8517,7 +8517,7 @@
                 <a:ea typeface="Microsoft JhengHei" pitchFamily="34" charset="-122"/>
                 <a:cs typeface="Microsoft JhengHei" pitchFamily="34" charset="-120"/>
               </a:rPr>
-              <a:t>交付模型 v11.5（v5.7 資料集）：九類逐類 AP50</a:t>
+              <a:t>交付模型 v13：九類逐類 AP50</a:t>
             </a:r>
             <a:endParaRPr lang="en-US" sz="3200" dirty="0"/>
           </a:p>
@@ -20561,7 +20561,7 @@
                 <a:ea typeface="Microsoft JhengHei" pitchFamily="34" charset="-122"/>
                 <a:cs typeface="Microsoft JhengHei" pitchFamily="34" charset="-120"/>
               </a:rPr>
-              <a:t>同 8 個 fp32 檔案、同一套量測方法　·　延遲與 mAP50 都來自 v11.5（v5.6 資料集）權重的匯出檔，交付權重尚未重新匯出</a:t>
+              <a:t>同 8 個 fp32 檔案、同一套量測方法　·　延遲與 mAP50 都來自 v11.5（v5.6 資料集）權重的匯出檔，交付模型 v13 尚未重新匯出</a:t>
             </a:r>
             <a:endParaRPr lang="en-US" sz="1500" dirty="0"/>
           </a:p>
@@ -28234,7 +28234,7 @@
                           <a:ea typeface="Microsoft JhengHei" pitchFamily="34" charset="-122"/>
                           <a:cs typeface="Microsoft JhengHei" pitchFamily="34" charset="-120"/>
                         </a:rPr>
-                        <a:t>那為什麼要換成 v5.7 資料集？</a:t>
+                        <a:t>v13 是什麼？為什麼要換？</a:t>
                       </a:r>
                       <a:endParaRPr lang="en-US" sz="1200" dirty="0">
                         <a:latin typeface="Microsoft JhengHei" charset="0"/>
@@ -28299,7 +28299,7 @@
                           <a:ea typeface="Microsoft JhengHei" pitchFamily="34" charset="-122"/>
                           <a:cs typeface="Microsoft JhengHei" pitchFamily="34" charset="-120"/>
                         </a:rPr>
-                        <a:t>模型還是 v11.5，只換資料集。舊的薊馬葉害框彼此矛盾，那個類別的數字量到的是標註噪聲；換了之後數字才有解釋力</a:t>
+                        <a:t>v13 是 v11.5 的訓練碼在 v5.7 資料集上重訓的交付模型。舊的薊馬葉害框彼此矛盾，量到的是標註噪聲；換了資料集數字才有解釋力</a:t>
                       </a:r>
                       <a:endParaRPr lang="en-US" sz="1200" dirty="0">
                         <a:latin typeface="Microsoft JhengHei" charset="0"/>
@@ -30638,7 +30638,7 @@
                 <a:ea typeface="Microsoft JhengHei" pitchFamily="34" charset="-122"/>
                 <a:cs typeface="Microsoft JhengHei" pitchFamily="34" charset="-120"/>
               </a:rPr>
-              <a:t>交付權重改用 v5.7 資料集訓練後，標註沒變的八類平均 AP50 變化</a:t>
+              <a:t>交付改為 v13 後，標註沒變的八類平均 AP50 變化</a:t>
             </a:r>
             <a:endParaRPr lang="en-US" sz="1400" dirty="0"/>
           </a:p>
@@ -37098,7 +37098,7 @@
                 <a:ea typeface="Microsoft JhengHei" pitchFamily="34" charset="-122"/>
                 <a:cs typeface="Microsoft JhengHei" pitchFamily="34" charset="-120"/>
               </a:rPr>
-              <a:t>選定之後只需要用交付權重（v5.7 資料集訓練）重新匯出那一個組合、重評精度。</a:t>
+              <a:t>選定之後只需要用 v13 重新匯出那一個組合、重評精度。</a:t>
             </a:r>
             <a:endParaRPr lang="en-US" sz="1400" dirty="0"/>
           </a:p>
